--- a/level2/course2.pptx
+++ b/level2/course2.pptx
@@ -198,7 +198,7 @@
           <a:p>
             <a:fld id="{B157FD80-104E-477A-84DF-AAA7C9A1979B}" type="datetimeFigureOut">
               <a:rPr lang="en-ZA" smtClean="0"/>
-              <a:t>2026/06/19</a:t>
+              <a:t>2026/07/11</a:t>
             </a:fld>
             <a:endParaRPr lang="en-ZA"/>
           </a:p>
@@ -615,7 +615,7 @@
           <a:p>
             <a:fld id="{8353421B-4862-4D3A-B9AB-BA663EF3CA0D}" type="datetimeFigureOut">
               <a:rPr lang="en-ZA" smtClean="0"/>
-              <a:t>2026/06/19</a:t>
+              <a:t>2026/07/11</a:t>
             </a:fld>
             <a:endParaRPr lang="en-ZA"/>
           </a:p>
@@ -815,7 +815,7 @@
           <a:p>
             <a:fld id="{8353421B-4862-4D3A-B9AB-BA663EF3CA0D}" type="datetimeFigureOut">
               <a:rPr lang="en-ZA" smtClean="0"/>
-              <a:t>2026/06/19</a:t>
+              <a:t>2026/07/11</a:t>
             </a:fld>
             <a:endParaRPr lang="en-ZA"/>
           </a:p>
@@ -1025,7 +1025,7 @@
           <a:p>
             <a:fld id="{8353421B-4862-4D3A-B9AB-BA663EF3CA0D}" type="datetimeFigureOut">
               <a:rPr lang="en-ZA" smtClean="0"/>
-              <a:t>2026/06/19</a:t>
+              <a:t>2026/07/11</a:t>
             </a:fld>
             <a:endParaRPr lang="en-ZA"/>
           </a:p>
@@ -1506,7 +1506,7 @@
           <a:p>
             <a:fld id="{8353421B-4862-4D3A-B9AB-BA663EF3CA0D}" type="datetimeFigureOut">
               <a:rPr lang="en-ZA" smtClean="0"/>
-              <a:t>2026/06/19</a:t>
+              <a:t>2026/07/11</a:t>
             </a:fld>
             <a:endParaRPr lang="en-ZA"/>
           </a:p>
@@ -1782,7 +1782,7 @@
           <a:p>
             <a:fld id="{8353421B-4862-4D3A-B9AB-BA663EF3CA0D}" type="datetimeFigureOut">
               <a:rPr lang="en-ZA" smtClean="0"/>
-              <a:t>2026/06/19</a:t>
+              <a:t>2026/07/11</a:t>
             </a:fld>
             <a:endParaRPr lang="en-ZA"/>
           </a:p>
@@ -2050,7 +2050,7 @@
           <a:p>
             <a:fld id="{8353421B-4862-4D3A-B9AB-BA663EF3CA0D}" type="datetimeFigureOut">
               <a:rPr lang="en-ZA" smtClean="0"/>
-              <a:t>2026/06/19</a:t>
+              <a:t>2026/07/11</a:t>
             </a:fld>
             <a:endParaRPr lang="en-ZA"/>
           </a:p>
@@ -2465,7 +2465,7 @@
           <a:p>
             <a:fld id="{8353421B-4862-4D3A-B9AB-BA663EF3CA0D}" type="datetimeFigureOut">
               <a:rPr lang="en-ZA" smtClean="0"/>
-              <a:t>2026/06/19</a:t>
+              <a:t>2026/07/11</a:t>
             </a:fld>
             <a:endParaRPr lang="en-ZA"/>
           </a:p>
@@ -2607,7 +2607,7 @@
           <a:p>
             <a:fld id="{8353421B-4862-4D3A-B9AB-BA663EF3CA0D}" type="datetimeFigureOut">
               <a:rPr lang="en-ZA" smtClean="0"/>
-              <a:t>2026/06/19</a:t>
+              <a:t>2026/07/11</a:t>
             </a:fld>
             <a:endParaRPr lang="en-ZA"/>
           </a:p>
@@ -2720,7 +2720,7 @@
           <a:p>
             <a:fld id="{8353421B-4862-4D3A-B9AB-BA663EF3CA0D}" type="datetimeFigureOut">
               <a:rPr lang="en-ZA" smtClean="0"/>
-              <a:t>2026/06/19</a:t>
+              <a:t>2026/07/11</a:t>
             </a:fld>
             <a:endParaRPr lang="en-ZA"/>
           </a:p>
@@ -3033,7 +3033,7 @@
           <a:p>
             <a:fld id="{8353421B-4862-4D3A-B9AB-BA663EF3CA0D}" type="datetimeFigureOut">
               <a:rPr lang="en-ZA" smtClean="0"/>
-              <a:t>2026/06/19</a:t>
+              <a:t>2026/07/11</a:t>
             </a:fld>
             <a:endParaRPr lang="en-ZA"/>
           </a:p>
@@ -3322,7 +3322,7 @@
           <a:p>
             <a:fld id="{8353421B-4862-4D3A-B9AB-BA663EF3CA0D}" type="datetimeFigureOut">
               <a:rPr lang="en-ZA" smtClean="0"/>
-              <a:t>2026/06/19</a:t>
+              <a:t>2026/07/11</a:t>
             </a:fld>
             <a:endParaRPr lang="en-ZA"/>
           </a:p>
@@ -3575,7 +3575,7 @@
           <a:p>
             <a:fld id="{8353421B-4862-4D3A-B9AB-BA663EF3CA0D}" type="datetimeFigureOut">
               <a:rPr lang="en-ZA" smtClean="0"/>
-              <a:t>2026/06/19</a:t>
+              <a:t>2026/07/11</a:t>
             </a:fld>
             <a:endParaRPr lang="en-ZA"/>
           </a:p>
@@ -4040,10 +4040,10 @@
       </p:sp>
       <p:pic>
         <p:nvPicPr>
-          <p:cNvPr id="4" name="Picture 3">
-            <a:extLst>
-              <a:ext uri="{FF2B5EF4-FFF2-40B4-BE49-F238E27FC236}">
-                <a16:creationId xmlns:a16="http://schemas.microsoft.com/office/drawing/2014/main" id="{1DC2ABBC-EDAF-BC7E-4C08-81CF758A5285}"/>
+          <p:cNvPr id="5" name="Image 4">
+            <a:extLst>
+              <a:ext uri="{FF2B5EF4-FFF2-40B4-BE49-F238E27FC236}">
+                <a16:creationId xmlns:a16="http://schemas.microsoft.com/office/drawing/2014/main" id="{F5A8F459-E6BE-4993-8380-9F7FE9C3D646}"/>
               </a:ext>
             </a:extLst>
           </p:cNvPr>
@@ -4054,15 +4054,14 @@
         </p:nvPicPr>
         <p:blipFill>
           <a:blip r:embed="rId2"/>
-          <a:srcRect b="16322"/>
           <a:stretch>
             <a:fillRect/>
           </a:stretch>
         </p:blipFill>
         <p:spPr>
           <a:xfrm>
-            <a:off x="1" y="0"/>
-            <a:ext cx="9144000" cy="5048042"/>
+            <a:off x="0" y="49113"/>
+            <a:ext cx="9144000" cy="5045273"/>
           </a:xfrm>
           <a:prstGeom prst="rect">
             <a:avLst/>

--- a/level2/course2.pptx
+++ b/level2/course2.pptx
@@ -5,11 +5,17 @@
     <p:sldMasterId id="2147483825" r:id="rId1"/>
   </p:sldMasterIdLst>
   <p:notesMasterIdLst>
-    <p:notesMasterId r:id="rId4"/>
+    <p:notesMasterId r:id="rId10"/>
   </p:notesMasterIdLst>
   <p:sldIdLst>
     <p:sldId id="256" r:id="rId2"/>
     <p:sldId id="279" r:id="rId3"/>
+    <p:sldId id="280" r:id="rId4"/>
+    <p:sldId id="283" r:id="rId5"/>
+    <p:sldId id="281" r:id="rId6"/>
+    <p:sldId id="282" r:id="rId7"/>
+    <p:sldId id="285" r:id="rId8"/>
+    <p:sldId id="284" r:id="rId9"/>
   </p:sldIdLst>
   <p:sldSz cx="9144000" cy="5143500" type="screen16x9"/>
   <p:notesSz cx="6858000" cy="9144000"/>
@@ -198,7 +204,7 @@
           <a:p>
             <a:fld id="{B157FD80-104E-477A-84DF-AAA7C9A1979B}" type="datetimeFigureOut">
               <a:rPr lang="en-ZA" smtClean="0"/>
-              <a:t>2026/07/11</a:t>
+              <a:t>2026/07/19</a:t>
             </a:fld>
             <a:endParaRPr lang="en-ZA"/>
           </a:p>
@@ -615,7 +621,7 @@
           <a:p>
             <a:fld id="{8353421B-4862-4D3A-B9AB-BA663EF3CA0D}" type="datetimeFigureOut">
               <a:rPr lang="en-ZA" smtClean="0"/>
-              <a:t>2026/07/11</a:t>
+              <a:t>2026/07/19</a:t>
             </a:fld>
             <a:endParaRPr lang="en-ZA"/>
           </a:p>
@@ -815,7 +821,7 @@
           <a:p>
             <a:fld id="{8353421B-4862-4D3A-B9AB-BA663EF3CA0D}" type="datetimeFigureOut">
               <a:rPr lang="en-ZA" smtClean="0"/>
-              <a:t>2026/07/11</a:t>
+              <a:t>2026/07/19</a:t>
             </a:fld>
             <a:endParaRPr lang="en-ZA"/>
           </a:p>
@@ -1025,7 +1031,7 @@
           <a:p>
             <a:fld id="{8353421B-4862-4D3A-B9AB-BA663EF3CA0D}" type="datetimeFigureOut">
               <a:rPr lang="en-ZA" smtClean="0"/>
-              <a:t>2026/07/11</a:t>
+              <a:t>2026/07/19</a:t>
             </a:fld>
             <a:endParaRPr lang="en-ZA"/>
           </a:p>
@@ -1506,7 +1512,7 @@
           <a:p>
             <a:fld id="{8353421B-4862-4D3A-B9AB-BA663EF3CA0D}" type="datetimeFigureOut">
               <a:rPr lang="en-ZA" smtClean="0"/>
-              <a:t>2026/07/11</a:t>
+              <a:t>2026/07/19</a:t>
             </a:fld>
             <a:endParaRPr lang="en-ZA"/>
           </a:p>
@@ -1782,7 +1788,7 @@
           <a:p>
             <a:fld id="{8353421B-4862-4D3A-B9AB-BA663EF3CA0D}" type="datetimeFigureOut">
               <a:rPr lang="en-ZA" smtClean="0"/>
-              <a:t>2026/07/11</a:t>
+              <a:t>2026/07/19</a:t>
             </a:fld>
             <a:endParaRPr lang="en-ZA"/>
           </a:p>
@@ -2050,7 +2056,7 @@
           <a:p>
             <a:fld id="{8353421B-4862-4D3A-B9AB-BA663EF3CA0D}" type="datetimeFigureOut">
               <a:rPr lang="en-ZA" smtClean="0"/>
-              <a:t>2026/07/11</a:t>
+              <a:t>2026/07/19</a:t>
             </a:fld>
             <a:endParaRPr lang="en-ZA"/>
           </a:p>
@@ -2465,7 +2471,7 @@
           <a:p>
             <a:fld id="{8353421B-4862-4D3A-B9AB-BA663EF3CA0D}" type="datetimeFigureOut">
               <a:rPr lang="en-ZA" smtClean="0"/>
-              <a:t>2026/07/11</a:t>
+              <a:t>2026/07/19</a:t>
             </a:fld>
             <a:endParaRPr lang="en-ZA"/>
           </a:p>
@@ -2607,7 +2613,7 @@
           <a:p>
             <a:fld id="{8353421B-4862-4D3A-B9AB-BA663EF3CA0D}" type="datetimeFigureOut">
               <a:rPr lang="en-ZA" smtClean="0"/>
-              <a:t>2026/07/11</a:t>
+              <a:t>2026/07/19</a:t>
             </a:fld>
             <a:endParaRPr lang="en-ZA"/>
           </a:p>
@@ -2720,7 +2726,7 @@
           <a:p>
             <a:fld id="{8353421B-4862-4D3A-B9AB-BA663EF3CA0D}" type="datetimeFigureOut">
               <a:rPr lang="en-ZA" smtClean="0"/>
-              <a:t>2026/07/11</a:t>
+              <a:t>2026/07/19</a:t>
             </a:fld>
             <a:endParaRPr lang="en-ZA"/>
           </a:p>
@@ -3033,7 +3039,7 @@
           <a:p>
             <a:fld id="{8353421B-4862-4D3A-B9AB-BA663EF3CA0D}" type="datetimeFigureOut">
               <a:rPr lang="en-ZA" smtClean="0"/>
-              <a:t>2026/07/11</a:t>
+              <a:t>2026/07/19</a:t>
             </a:fld>
             <a:endParaRPr lang="en-ZA"/>
           </a:p>
@@ -3322,7 +3328,7 @@
           <a:p>
             <a:fld id="{8353421B-4862-4D3A-B9AB-BA663EF3CA0D}" type="datetimeFigureOut">
               <a:rPr lang="en-ZA" smtClean="0"/>
-              <a:t>2026/07/11</a:t>
+              <a:t>2026/07/19</a:t>
             </a:fld>
             <a:endParaRPr lang="en-ZA"/>
           </a:p>
@@ -3575,7 +3581,7 @@
           <a:p>
             <a:fld id="{8353421B-4862-4D3A-B9AB-BA663EF3CA0D}" type="datetimeFigureOut">
               <a:rPr lang="en-ZA" smtClean="0"/>
-              <a:t>2026/07/11</a:t>
+              <a:t>2026/07/19</a:t>
             </a:fld>
             <a:endParaRPr lang="en-ZA"/>
           </a:p>
@@ -4093,10 +4099,3211 @@
           <a:chExt cx="0" cy="0"/>
         </a:xfrm>
       </p:grpSpPr>
+      <p:sp>
+        <p:nvSpPr>
+          <p:cNvPr id="2" name="Rectangle 1">
+            <a:extLst>
+              <a:ext uri="{FF2B5EF4-FFF2-40B4-BE49-F238E27FC236}">
+                <a16:creationId xmlns:a16="http://schemas.microsoft.com/office/drawing/2014/main" id="{5E0DFB94-64B5-41D2-BE22-49AE198DB098}"/>
+              </a:ext>
+            </a:extLst>
+          </p:cNvPr>
+          <p:cNvSpPr/>
+          <p:nvPr/>
+        </p:nvSpPr>
+        <p:spPr>
+          <a:xfrm>
+            <a:off x="530196" y="462297"/>
+            <a:ext cx="2738570" cy="400110"/>
+          </a:xfrm>
+          <a:prstGeom prst="rect">
+            <a:avLst/>
+          </a:prstGeom>
+        </p:spPr>
+        <p:txBody>
+          <a:bodyPr wrap="none">
+            <a:spAutoFit/>
+          </a:bodyPr>
+          <a:lstStyle/>
+          <a:p>
+            <a:r>
+              <a:rPr lang="en-US" sz="2000" dirty="0">
+                <a:effectLst>
+                  <a:outerShdw blurRad="38100" dist="38100" dir="2700000" algn="tl">
+                    <a:srgbClr val="000000">
+                      <a:alpha val="43137"/>
+                    </a:srgbClr>
+                  </a:outerShdw>
+                </a:effectLst>
+              </a:rPr>
+              <a:t>Window Size (geometry)</a:t>
+            </a:r>
+          </a:p>
+        </p:txBody>
+      </p:sp>
+      <p:pic>
+        <p:nvPicPr>
+          <p:cNvPr id="4" name="Image 3">
+            <a:extLst>
+              <a:ext uri="{FF2B5EF4-FFF2-40B4-BE49-F238E27FC236}">
+                <a16:creationId xmlns:a16="http://schemas.microsoft.com/office/drawing/2014/main" id="{453C60D4-3E92-464E-A1C6-4D01646DB140}"/>
+              </a:ext>
+            </a:extLst>
+          </p:cNvPr>
+          <p:cNvPicPr>
+            <a:picLocks noChangeAspect="1"/>
+          </p:cNvPicPr>
+          <p:nvPr/>
+        </p:nvPicPr>
+        <p:blipFill>
+          <a:blip r:embed="rId2"/>
+          <a:stretch>
+            <a:fillRect/>
+          </a:stretch>
+        </p:blipFill>
+        <p:spPr>
+          <a:xfrm>
+            <a:off x="970727" y="1051733"/>
+            <a:ext cx="3992653" cy="438587"/>
+          </a:xfrm>
+          <a:prstGeom prst="rect">
+            <a:avLst/>
+          </a:prstGeom>
+          <a:ln>
+            <a:noFill/>
+          </a:ln>
+          <a:effectLst>
+            <a:outerShdw blurRad="292100" dist="139700" dir="2700000" algn="tl" rotWithShape="0">
+              <a:srgbClr val="333333">
+                <a:alpha val="65000"/>
+              </a:srgbClr>
+            </a:outerShdw>
+          </a:effectLst>
+        </p:spPr>
+      </p:pic>
+      <p:pic>
+        <p:nvPicPr>
+          <p:cNvPr id="5" name="Image 4">
+            <a:extLst>
+              <a:ext uri="{FF2B5EF4-FFF2-40B4-BE49-F238E27FC236}">
+                <a16:creationId xmlns:a16="http://schemas.microsoft.com/office/drawing/2014/main" id="{CC9E34BA-2BA8-41DC-B657-127D3444FFBB}"/>
+              </a:ext>
+            </a:extLst>
+          </p:cNvPr>
+          <p:cNvPicPr>
+            <a:picLocks noChangeAspect="1"/>
+          </p:cNvPicPr>
+          <p:nvPr/>
+        </p:nvPicPr>
+        <p:blipFill>
+          <a:blip r:embed="rId3"/>
+          <a:stretch>
+            <a:fillRect/>
+          </a:stretch>
+        </p:blipFill>
+        <p:spPr>
+          <a:xfrm>
+            <a:off x="1430666" y="1845883"/>
+            <a:ext cx="3361410" cy="2744385"/>
+          </a:xfrm>
+          <a:prstGeom prst="rect">
+            <a:avLst/>
+          </a:prstGeom>
+          <a:ln>
+            <a:noFill/>
+          </a:ln>
+          <a:effectLst>
+            <a:outerShdw blurRad="292100" dist="139700" dir="2700000" algn="tl" rotWithShape="0">
+              <a:srgbClr val="333333">
+                <a:alpha val="65000"/>
+              </a:srgbClr>
+            </a:outerShdw>
+          </a:effectLst>
+        </p:spPr>
+      </p:pic>
+      <p:pic>
+        <p:nvPicPr>
+          <p:cNvPr id="6" name="Image 5">
+            <a:extLst>
+              <a:ext uri="{FF2B5EF4-FFF2-40B4-BE49-F238E27FC236}">
+                <a16:creationId xmlns:a16="http://schemas.microsoft.com/office/drawing/2014/main" id="{AF31E289-F6FE-440C-BDDF-48448B31BC78}"/>
+              </a:ext>
+            </a:extLst>
+          </p:cNvPr>
+          <p:cNvPicPr>
+            <a:picLocks noChangeAspect="1"/>
+          </p:cNvPicPr>
+          <p:nvPr/>
+        </p:nvPicPr>
+        <p:blipFill>
+          <a:blip r:embed="rId4"/>
+          <a:stretch>
+            <a:fillRect/>
+          </a:stretch>
+        </p:blipFill>
+        <p:spPr>
+          <a:xfrm>
+            <a:off x="5238854" y="1085886"/>
+            <a:ext cx="3708884" cy="368318"/>
+          </a:xfrm>
+          <a:prstGeom prst="rect">
+            <a:avLst/>
+          </a:prstGeom>
+          <a:ln>
+            <a:noFill/>
+          </a:ln>
+          <a:effectLst>
+            <a:outerShdw blurRad="292100" dist="139700" dir="2700000" algn="tl" rotWithShape="0">
+              <a:srgbClr val="333333">
+                <a:alpha val="65000"/>
+              </a:srgbClr>
+            </a:outerShdw>
+          </a:effectLst>
+        </p:spPr>
+      </p:pic>
     </p:spTree>
     <p:extLst>
       <p:ext uri="{BB962C8B-B14F-4D97-AF65-F5344CB8AC3E}">
         <p14:creationId xmlns:p14="http://schemas.microsoft.com/office/powerpoint/2010/main" val="4044890053"/>
+      </p:ext>
+    </p:extLst>
+  </p:cSld>
+  <p:clrMapOvr>
+    <a:masterClrMapping/>
+  </p:clrMapOvr>
+</p:sld>
+</file>
+
+<file path=ppt/slides/slide3.xml><?xml version="1.0" encoding="utf-8"?>
+<p:sld xmlns:a="http://schemas.openxmlformats.org/drawingml/2006/main" xmlns:r="http://schemas.openxmlformats.org/officeDocument/2006/relationships" xmlns:p="http://schemas.openxmlformats.org/presentationml/2006/main">
+  <p:cSld>
+    <p:spTree>
+      <p:nvGrpSpPr>
+        <p:cNvPr id="1" name=""/>
+        <p:cNvGrpSpPr/>
+        <p:nvPr/>
+      </p:nvGrpSpPr>
+      <p:grpSpPr>
+        <a:xfrm>
+          <a:off x="0" y="0"/>
+          <a:ext cx="0" cy="0"/>
+          <a:chOff x="0" y="0"/>
+          <a:chExt cx="0" cy="0"/>
+        </a:xfrm>
+      </p:grpSpPr>
+      <p:sp>
+        <p:nvSpPr>
+          <p:cNvPr id="2" name="Rectangle 1">
+            <a:extLst>
+              <a:ext uri="{FF2B5EF4-FFF2-40B4-BE49-F238E27FC236}">
+                <a16:creationId xmlns:a16="http://schemas.microsoft.com/office/drawing/2014/main" id="{A2B52236-66FE-45FE-8BC3-CB839A24268A}"/>
+              </a:ext>
+            </a:extLst>
+          </p:cNvPr>
+          <p:cNvSpPr/>
+          <p:nvPr/>
+        </p:nvSpPr>
+        <p:spPr>
+          <a:xfrm>
+            <a:off x="945749" y="664375"/>
+            <a:ext cx="1555298" cy="400110"/>
+          </a:xfrm>
+          <a:prstGeom prst="rect">
+            <a:avLst/>
+          </a:prstGeom>
+        </p:spPr>
+        <p:txBody>
+          <a:bodyPr wrap="none">
+            <a:spAutoFit/>
+          </a:bodyPr>
+          <a:lstStyle/>
+          <a:p>
+            <a:r>
+              <a:rPr lang="en-US" sz="2000" dirty="0">
+                <a:effectLst>
+                  <a:outerShdw blurRad="38100" dist="38100" dir="2700000" algn="tl">
+                    <a:srgbClr val="000000">
+                      <a:alpha val="43137"/>
+                    </a:srgbClr>
+                  </a:outerShdw>
+                </a:effectLst>
+              </a:rPr>
+              <a:t>Window Icon</a:t>
+            </a:r>
+          </a:p>
+        </p:txBody>
+      </p:sp>
+      <p:pic>
+        <p:nvPicPr>
+          <p:cNvPr id="3" name="Image 2">
+            <a:extLst>
+              <a:ext uri="{FF2B5EF4-FFF2-40B4-BE49-F238E27FC236}">
+                <a16:creationId xmlns:a16="http://schemas.microsoft.com/office/drawing/2014/main" id="{09C8C863-A649-4325-AC57-0A1CA367B746}"/>
+              </a:ext>
+            </a:extLst>
+          </p:cNvPr>
+          <p:cNvPicPr>
+            <a:picLocks noChangeAspect="1"/>
+          </p:cNvPicPr>
+          <p:nvPr/>
+        </p:nvPicPr>
+        <p:blipFill>
+          <a:blip r:embed="rId2"/>
+          <a:stretch>
+            <a:fillRect/>
+          </a:stretch>
+        </p:blipFill>
+        <p:spPr>
+          <a:xfrm>
+            <a:off x="1288921" y="2834135"/>
+            <a:ext cx="6020855" cy="611139"/>
+          </a:xfrm>
+          <a:prstGeom prst="rect">
+            <a:avLst/>
+          </a:prstGeom>
+          <a:ln>
+            <a:noFill/>
+          </a:ln>
+          <a:effectLst>
+            <a:outerShdw blurRad="292100" dist="139700" dir="2700000" algn="tl" rotWithShape="0">
+              <a:srgbClr val="333333">
+                <a:alpha val="65000"/>
+              </a:srgbClr>
+            </a:outerShdw>
+          </a:effectLst>
+        </p:spPr>
+      </p:pic>
+      <p:pic>
+        <p:nvPicPr>
+          <p:cNvPr id="4" name="Image 3">
+            <a:extLst>
+              <a:ext uri="{FF2B5EF4-FFF2-40B4-BE49-F238E27FC236}">
+                <a16:creationId xmlns:a16="http://schemas.microsoft.com/office/drawing/2014/main" id="{7F62BB65-AFB7-4A7E-8040-FDA0DD609155}"/>
+              </a:ext>
+            </a:extLst>
+          </p:cNvPr>
+          <p:cNvPicPr>
+            <a:picLocks noChangeAspect="1"/>
+          </p:cNvPicPr>
+          <p:nvPr/>
+        </p:nvPicPr>
+        <p:blipFill>
+          <a:blip r:embed="rId3"/>
+          <a:stretch>
+            <a:fillRect/>
+          </a:stretch>
+        </p:blipFill>
+        <p:spPr>
+          <a:xfrm>
+            <a:off x="1288921" y="1386320"/>
+            <a:ext cx="5825041" cy="642468"/>
+          </a:xfrm>
+          <a:prstGeom prst="rect">
+            <a:avLst/>
+          </a:prstGeom>
+          <a:ln>
+            <a:noFill/>
+          </a:ln>
+          <a:effectLst>
+            <a:outerShdw blurRad="292100" dist="139700" dir="2700000" algn="tl" rotWithShape="0">
+              <a:srgbClr val="333333">
+                <a:alpha val="65000"/>
+              </a:srgbClr>
+            </a:outerShdw>
+          </a:effectLst>
+        </p:spPr>
+      </p:pic>
+    </p:spTree>
+    <p:extLst>
+      <p:ext uri="{BB962C8B-B14F-4D97-AF65-F5344CB8AC3E}">
+        <p14:creationId xmlns:p14="http://schemas.microsoft.com/office/powerpoint/2010/main" val="1496506676"/>
+      </p:ext>
+    </p:extLst>
+  </p:cSld>
+  <p:clrMapOvr>
+    <a:masterClrMapping/>
+  </p:clrMapOvr>
+</p:sld>
+</file>
+
+<file path=ppt/slides/slide4.xml><?xml version="1.0" encoding="utf-8"?>
+<p:sld xmlns:a="http://schemas.openxmlformats.org/drawingml/2006/main" xmlns:r="http://schemas.openxmlformats.org/officeDocument/2006/relationships" xmlns:p="http://schemas.openxmlformats.org/presentationml/2006/main">
+  <p:cSld>
+    <p:spTree>
+      <p:nvGrpSpPr>
+        <p:cNvPr id="1" name=""/>
+        <p:cNvGrpSpPr/>
+        <p:nvPr/>
+      </p:nvGrpSpPr>
+      <p:grpSpPr>
+        <a:xfrm>
+          <a:off x="0" y="0"/>
+          <a:ext cx="0" cy="0"/>
+          <a:chOff x="0" y="0"/>
+          <a:chExt cx="0" cy="0"/>
+        </a:xfrm>
+      </p:grpSpPr>
+      <p:sp>
+        <p:nvSpPr>
+          <p:cNvPr id="2" name="Rectangle 1">
+            <a:extLst>
+              <a:ext uri="{FF2B5EF4-FFF2-40B4-BE49-F238E27FC236}">
+                <a16:creationId xmlns:a16="http://schemas.microsoft.com/office/drawing/2014/main" id="{E0982E47-D9EC-450F-B4F2-B2EB3666FDB9}"/>
+              </a:ext>
+            </a:extLst>
+          </p:cNvPr>
+          <p:cNvSpPr/>
+          <p:nvPr/>
+        </p:nvSpPr>
+        <p:spPr>
+          <a:xfrm>
+            <a:off x="1078485" y="697674"/>
+            <a:ext cx="1497911" cy="369332"/>
+          </a:xfrm>
+          <a:prstGeom prst="rect">
+            <a:avLst/>
+          </a:prstGeom>
+        </p:spPr>
+        <p:txBody>
+          <a:bodyPr wrap="none">
+            <a:spAutoFit/>
+          </a:bodyPr>
+          <a:lstStyle/>
+          <a:p>
+            <a:r>
+              <a:rPr lang="en-US" dirty="0">
+                <a:effectLst>
+                  <a:outerShdw blurRad="38100" dist="38100" dir="2700000" algn="tl">
+                    <a:srgbClr val="000000">
+                      <a:alpha val="43137"/>
+                    </a:srgbClr>
+                  </a:outerShdw>
+                </a:effectLst>
+              </a:rPr>
+              <a:t>Window color</a:t>
+            </a:r>
+          </a:p>
+        </p:txBody>
+      </p:sp>
+      <p:pic>
+        <p:nvPicPr>
+          <p:cNvPr id="3" name="Image 2">
+            <a:extLst>
+              <a:ext uri="{FF2B5EF4-FFF2-40B4-BE49-F238E27FC236}">
+                <a16:creationId xmlns:a16="http://schemas.microsoft.com/office/drawing/2014/main" id="{739D559D-7161-4D9E-8281-AA90E679204F}"/>
+              </a:ext>
+            </a:extLst>
+          </p:cNvPr>
+          <p:cNvPicPr>
+            <a:picLocks noChangeAspect="1"/>
+          </p:cNvPicPr>
+          <p:nvPr/>
+        </p:nvPicPr>
+        <p:blipFill>
+          <a:blip r:embed="rId2"/>
+          <a:stretch>
+            <a:fillRect/>
+          </a:stretch>
+        </p:blipFill>
+        <p:spPr>
+          <a:xfrm>
+            <a:off x="1179576" y="1660713"/>
+            <a:ext cx="5979337" cy="911037"/>
+          </a:xfrm>
+          <a:prstGeom prst="rect">
+            <a:avLst/>
+          </a:prstGeom>
+          <a:ln>
+            <a:noFill/>
+          </a:ln>
+          <a:effectLst>
+            <a:outerShdw blurRad="292100" dist="139700" dir="2700000" algn="tl" rotWithShape="0">
+              <a:srgbClr val="333333">
+                <a:alpha val="65000"/>
+              </a:srgbClr>
+            </a:outerShdw>
+          </a:effectLst>
+        </p:spPr>
+      </p:pic>
+    </p:spTree>
+    <p:extLst>
+      <p:ext uri="{BB962C8B-B14F-4D97-AF65-F5344CB8AC3E}">
+        <p14:creationId xmlns:p14="http://schemas.microsoft.com/office/powerpoint/2010/main" val="1259816544"/>
+      </p:ext>
+    </p:extLst>
+  </p:cSld>
+  <p:clrMapOvr>
+    <a:masterClrMapping/>
+  </p:clrMapOvr>
+</p:sld>
+</file>
+
+<file path=ppt/slides/slide5.xml><?xml version="1.0" encoding="utf-8"?>
+<p:sld xmlns:a="http://schemas.openxmlformats.org/drawingml/2006/main" xmlns:r="http://schemas.openxmlformats.org/officeDocument/2006/relationships" xmlns:p="http://schemas.openxmlformats.org/presentationml/2006/main">
+  <p:cSld>
+    <p:spTree>
+      <p:nvGrpSpPr>
+        <p:cNvPr id="1" name=""/>
+        <p:cNvGrpSpPr/>
+        <p:nvPr/>
+      </p:nvGrpSpPr>
+      <p:grpSpPr>
+        <a:xfrm>
+          <a:off x="0" y="0"/>
+          <a:ext cx="0" cy="0"/>
+          <a:chOff x="0" y="0"/>
+          <a:chExt cx="0" cy="0"/>
+        </a:xfrm>
+      </p:grpSpPr>
+      <p:sp>
+        <p:nvSpPr>
+          <p:cNvPr id="2" name="Rectangle 1">
+            <a:extLst>
+              <a:ext uri="{FF2B5EF4-FFF2-40B4-BE49-F238E27FC236}">
+                <a16:creationId xmlns:a16="http://schemas.microsoft.com/office/drawing/2014/main" id="{F7356D6E-CA29-46D4-85B6-23BD3088F055}"/>
+              </a:ext>
+            </a:extLst>
+          </p:cNvPr>
+          <p:cNvSpPr/>
+          <p:nvPr/>
+        </p:nvSpPr>
+        <p:spPr>
+          <a:xfrm>
+            <a:off x="815886" y="1039076"/>
+            <a:ext cx="7550115" cy="369332"/>
+          </a:xfrm>
+          <a:prstGeom prst="rect">
+            <a:avLst/>
+          </a:prstGeom>
+        </p:spPr>
+        <p:txBody>
+          <a:bodyPr wrap="square">
+            <a:spAutoFit/>
+          </a:bodyPr>
+          <a:lstStyle/>
+          <a:p>
+            <a:r>
+              <a:rPr lang="en-US" dirty="0"/>
+              <a:t>The </a:t>
+            </a:r>
+            <a:r>
+              <a:rPr lang="en-US" b="1" dirty="0"/>
+              <a:t>Label</a:t>
+            </a:r>
+            <a:r>
+              <a:rPr lang="en-US" dirty="0"/>
+              <a:t> widget in </a:t>
+            </a:r>
+            <a:r>
+              <a:rPr lang="en-US" dirty="0" err="1"/>
+              <a:t>Tkinter</a:t>
+            </a:r>
+            <a:r>
+              <a:rPr lang="en-US" dirty="0"/>
+              <a:t> is used to </a:t>
+            </a:r>
+            <a:r>
+              <a:rPr lang="en-US" b="1" dirty="0"/>
+              <a:t>display text or images</a:t>
+            </a:r>
+            <a:r>
+              <a:rPr lang="en-US" dirty="0"/>
+              <a:t>.  .</a:t>
+            </a:r>
+          </a:p>
+        </p:txBody>
+      </p:sp>
+      <p:sp>
+        <p:nvSpPr>
+          <p:cNvPr id="3" name="Rectangle 2">
+            <a:extLst>
+              <a:ext uri="{FF2B5EF4-FFF2-40B4-BE49-F238E27FC236}">
+                <a16:creationId xmlns:a16="http://schemas.microsoft.com/office/drawing/2014/main" id="{C2AC6201-C39D-46C3-8429-904277261D63}"/>
+              </a:ext>
+            </a:extLst>
+          </p:cNvPr>
+          <p:cNvSpPr/>
+          <p:nvPr/>
+        </p:nvSpPr>
+        <p:spPr>
+          <a:xfrm>
+            <a:off x="676796" y="563336"/>
+            <a:ext cx="1435073" cy="369332"/>
+          </a:xfrm>
+          <a:prstGeom prst="rect">
+            <a:avLst/>
+          </a:prstGeom>
+        </p:spPr>
+        <p:txBody>
+          <a:bodyPr wrap="none">
+            <a:spAutoFit/>
+          </a:bodyPr>
+          <a:lstStyle/>
+          <a:p>
+            <a:r>
+              <a:rPr lang="en-US" b="1" dirty="0"/>
+              <a:t>Label</a:t>
+            </a:r>
+            <a:r>
+              <a:rPr lang="en-US" dirty="0"/>
+              <a:t> widget </a:t>
+            </a:r>
+          </a:p>
+        </p:txBody>
+      </p:sp>
+      <p:pic>
+        <p:nvPicPr>
+          <p:cNvPr id="4" name="Image 3">
+            <a:extLst>
+              <a:ext uri="{FF2B5EF4-FFF2-40B4-BE49-F238E27FC236}">
+                <a16:creationId xmlns:a16="http://schemas.microsoft.com/office/drawing/2014/main" id="{C8FD97BF-5921-4875-8C17-7BABC6B88CBE}"/>
+              </a:ext>
+            </a:extLst>
+          </p:cNvPr>
+          <p:cNvPicPr>
+            <a:picLocks noChangeAspect="1"/>
+          </p:cNvPicPr>
+          <p:nvPr/>
+        </p:nvPicPr>
+        <p:blipFill rotWithShape="1">
+          <a:blip r:embed="rId2"/>
+          <a:srcRect b="63105"/>
+          <a:stretch/>
+        </p:blipFill>
+        <p:spPr>
+          <a:xfrm>
+            <a:off x="1505144" y="1767560"/>
+            <a:ext cx="3884287" cy="507894"/>
+          </a:xfrm>
+          <a:prstGeom prst="rect">
+            <a:avLst/>
+          </a:prstGeom>
+        </p:spPr>
+      </p:pic>
+    </p:spTree>
+    <p:extLst>
+      <p:ext uri="{BB962C8B-B14F-4D97-AF65-F5344CB8AC3E}">
+        <p14:creationId xmlns:p14="http://schemas.microsoft.com/office/powerpoint/2010/main" val="2732136947"/>
+      </p:ext>
+    </p:extLst>
+  </p:cSld>
+  <p:clrMapOvr>
+    <a:masterClrMapping/>
+  </p:clrMapOvr>
+</p:sld>
+</file>
+
+<file path=ppt/slides/slide6.xml><?xml version="1.0" encoding="utf-8"?>
+<p:sld xmlns:a="http://schemas.openxmlformats.org/drawingml/2006/main" xmlns:r="http://schemas.openxmlformats.org/officeDocument/2006/relationships" xmlns:p="http://schemas.openxmlformats.org/presentationml/2006/main">
+  <p:cSld>
+    <p:spTree>
+      <p:nvGrpSpPr>
+        <p:cNvPr id="1" name=""/>
+        <p:cNvGrpSpPr/>
+        <p:nvPr/>
+      </p:nvGrpSpPr>
+      <p:grpSpPr>
+        <a:xfrm>
+          <a:off x="0" y="0"/>
+          <a:ext cx="0" cy="0"/>
+          <a:chOff x="0" y="0"/>
+          <a:chExt cx="0" cy="0"/>
+        </a:xfrm>
+      </p:grpSpPr>
+      <p:pic>
+        <p:nvPicPr>
+          <p:cNvPr id="3" name="Image 2">
+            <a:extLst>
+              <a:ext uri="{FF2B5EF4-FFF2-40B4-BE49-F238E27FC236}">
+                <a16:creationId xmlns:a16="http://schemas.microsoft.com/office/drawing/2014/main" id="{65C544E1-5546-4D6E-A39D-5A0D6FB61688}"/>
+              </a:ext>
+            </a:extLst>
+          </p:cNvPr>
+          <p:cNvPicPr>
+            <a:picLocks noChangeAspect="1"/>
+          </p:cNvPicPr>
+          <p:nvPr/>
+        </p:nvPicPr>
+        <p:blipFill rotWithShape="1">
+          <a:blip r:embed="rId2"/>
+          <a:srcRect b="47907"/>
+          <a:stretch/>
+        </p:blipFill>
+        <p:spPr>
+          <a:xfrm>
+            <a:off x="36286" y="690960"/>
+            <a:ext cx="4535714" cy="3544186"/>
+          </a:xfrm>
+          <a:prstGeom prst="rect">
+            <a:avLst/>
+          </a:prstGeom>
+        </p:spPr>
+      </p:pic>
+      <p:pic>
+        <p:nvPicPr>
+          <p:cNvPr id="4" name="Image 3">
+            <a:extLst>
+              <a:ext uri="{FF2B5EF4-FFF2-40B4-BE49-F238E27FC236}">
+                <a16:creationId xmlns:a16="http://schemas.microsoft.com/office/drawing/2014/main" id="{CDFA91F0-B513-4165-9B51-CCEFC5FFA54D}"/>
+              </a:ext>
+            </a:extLst>
+          </p:cNvPr>
+          <p:cNvPicPr>
+            <a:picLocks noChangeAspect="1"/>
+          </p:cNvPicPr>
+          <p:nvPr/>
+        </p:nvPicPr>
+        <p:blipFill rotWithShape="1">
+          <a:blip r:embed="rId2"/>
+          <a:srcRect t="52024"/>
+          <a:stretch/>
+        </p:blipFill>
+        <p:spPr>
+          <a:xfrm>
+            <a:off x="4572000" y="980931"/>
+            <a:ext cx="4421160" cy="3181637"/>
+          </a:xfrm>
+          <a:prstGeom prst="rect">
+            <a:avLst/>
+          </a:prstGeom>
+        </p:spPr>
+      </p:pic>
+    </p:spTree>
+    <p:extLst>
+      <p:ext uri="{BB962C8B-B14F-4D97-AF65-F5344CB8AC3E}">
+        <p14:creationId xmlns:p14="http://schemas.microsoft.com/office/powerpoint/2010/main" val="3579090293"/>
+      </p:ext>
+    </p:extLst>
+  </p:cSld>
+  <p:clrMapOvr>
+    <a:masterClrMapping/>
+  </p:clrMapOvr>
+</p:sld>
+</file>
+
+<file path=ppt/slides/slide7.xml><?xml version="1.0" encoding="utf-8"?>
+<p:sld xmlns:a="http://schemas.openxmlformats.org/drawingml/2006/main" xmlns:r="http://schemas.openxmlformats.org/officeDocument/2006/relationships" xmlns:p="http://schemas.openxmlformats.org/presentationml/2006/main">
+  <p:cSld>
+    <p:spTree>
+      <p:nvGrpSpPr>
+        <p:cNvPr id="1" name=""/>
+        <p:cNvGrpSpPr/>
+        <p:nvPr/>
+      </p:nvGrpSpPr>
+      <p:grpSpPr>
+        <a:xfrm>
+          <a:off x="0" y="0"/>
+          <a:ext cx="0" cy="0"/>
+          <a:chOff x="0" y="0"/>
+          <a:chExt cx="0" cy="0"/>
+        </a:xfrm>
+      </p:grpSpPr>
+      <p:sp>
+        <p:nvSpPr>
+          <p:cNvPr id="2" name="Rectangle 1">
+            <a:extLst>
+              <a:ext uri="{FF2B5EF4-FFF2-40B4-BE49-F238E27FC236}">
+                <a16:creationId xmlns:a16="http://schemas.microsoft.com/office/drawing/2014/main" id="{BFEDB1E1-D8C7-482A-9A30-FAB44450E4ED}"/>
+              </a:ext>
+            </a:extLst>
+          </p:cNvPr>
+          <p:cNvSpPr>
+            <a:spLocks noChangeArrowheads="1"/>
+          </p:cNvSpPr>
+          <p:nvPr/>
+        </p:nvSpPr>
+        <p:spPr bwMode="auto">
+          <a:xfrm>
+            <a:off x="587705" y="70885"/>
+            <a:ext cx="7194698" cy="707886"/>
+          </a:xfrm>
+          <a:prstGeom prst="rect">
+            <a:avLst/>
+          </a:prstGeom>
+          <a:noFill/>
+          <a:ln>
+            <a:noFill/>
+          </a:ln>
+          <a:effectLst/>
+          <a:extLst>
+            <a:ext uri="{909E8E84-426E-40DD-AFC4-6F175D3DCCD1}">
+              <a14:hiddenFill xmlns:a14="http://schemas.microsoft.com/office/drawing/2010/main">
+                <a:solidFill>
+                  <a:schemeClr val="accent1"/>
+                </a:solidFill>
+              </a14:hiddenFill>
+            </a:ext>
+            <a:ext uri="{91240B29-F687-4F45-9708-019B960494DF}">
+              <a14:hiddenLine xmlns:a14="http://schemas.microsoft.com/office/drawing/2010/main" w="9525">
+                <a:solidFill>
+                  <a:schemeClr val="tx1"/>
+                </a:solidFill>
+                <a:miter lim="800000"/>
+                <a:headEnd/>
+                <a:tailEnd/>
+              </a14:hiddenLine>
+            </a:ext>
+            <a:ext uri="{AF507438-7753-43E0-B8FC-AC1667EBCBE1}">
+              <a14:hiddenEffects xmlns:a14="http://schemas.microsoft.com/office/drawing/2010/main">
+                <a:effectLst>
+                  <a:outerShdw dist="35921" dir="2700000" algn="ctr" rotWithShape="0">
+                    <a:schemeClr val="bg2"/>
+                  </a:outerShdw>
+                </a:effectLst>
+              </a14:hiddenEffects>
+            </a:ext>
+          </a:extLst>
+        </p:spPr>
+        <p:txBody>
+          <a:bodyPr vert="horz" wrap="square" lIns="91440" tIns="45720" rIns="91440" bIns="45720" numCol="1" anchor="ctr" anchorCtr="0" compatLnSpc="1">
+            <a:prstTxWarp prst="textNoShape">
+              <a:avLst/>
+            </a:prstTxWarp>
+            <a:spAutoFit/>
+          </a:bodyPr>
+          <a:lstStyle/>
+          <a:p>
+            <a:pPr marL="0" marR="0" lvl="0" indent="0" algn="l" defTabSz="914400" rtl="0" eaLnBrk="0" fontAlgn="base" latinLnBrk="0" hangingPunct="0">
+              <a:lnSpc>
+                <a:spcPct val="100000"/>
+              </a:lnSpc>
+              <a:spcBef>
+                <a:spcPct val="0"/>
+              </a:spcBef>
+              <a:spcAft>
+                <a:spcPct val="0"/>
+              </a:spcAft>
+              <a:buClrTx/>
+              <a:buSzTx/>
+              <a:buFontTx/>
+              <a:buNone/>
+              <a:tabLst/>
+            </a:pPr>
+            <a:r>
+              <a:rPr kumimoji="0" lang="en-US" altLang="en-US" sz="2000" b="1" i="0" u="none" strike="noStrike" cap="none" normalizeH="0" baseline="0" dirty="0">
+                <a:ln>
+                  <a:noFill/>
+                </a:ln>
+                <a:solidFill>
+                  <a:schemeClr val="tx1"/>
+                </a:solidFill>
+                <a:effectLst/>
+                <a:latin typeface="Arial Unicode MS"/>
+              </a:rPr>
+              <a:t>pack()</a:t>
+            </a:r>
+            <a:r>
+              <a:rPr kumimoji="0" lang="en-US" altLang="en-US" sz="2000" b="1" i="0" u="none" strike="noStrike" cap="none" normalizeH="0" baseline="0" dirty="0">
+                <a:ln>
+                  <a:noFill/>
+                </a:ln>
+                <a:solidFill>
+                  <a:schemeClr val="tx1"/>
+                </a:solidFill>
+                <a:effectLst/>
+              </a:rPr>
+              <a:t> </a:t>
+            </a:r>
+            <a:r>
+              <a:rPr kumimoji="0" lang="en-US" altLang="en-US" sz="2000" b="0" i="0" u="none" strike="noStrike" cap="none" normalizeH="0" baseline="0" dirty="0">
+                <a:ln>
+                  <a:noFill/>
+                </a:ln>
+                <a:solidFill>
+                  <a:schemeClr val="tx1"/>
+                </a:solidFill>
+                <a:effectLst/>
+              </a:rPr>
+              <a:t>is the method that makes a widget appear in the window and determines its position and spacing. </a:t>
+            </a:r>
+            <a:endParaRPr kumimoji="0" lang="en-US" altLang="en-US" sz="2000" b="0" i="0" u="none" strike="noStrike" cap="none" normalizeH="0" baseline="0" dirty="0">
+              <a:ln>
+                <a:noFill/>
+              </a:ln>
+              <a:solidFill>
+                <a:schemeClr val="tx1"/>
+              </a:solidFill>
+              <a:effectLst/>
+              <a:latin typeface="Arial" panose="020B0604020202020204" pitchFamily="34" charset="0"/>
+            </a:endParaRPr>
+          </a:p>
+        </p:txBody>
+      </p:sp>
+      <p:graphicFrame>
+        <p:nvGraphicFramePr>
+          <p:cNvPr id="4" name="Tableau 3">
+            <a:extLst>
+              <a:ext uri="{FF2B5EF4-FFF2-40B4-BE49-F238E27FC236}">
+                <a16:creationId xmlns:a16="http://schemas.microsoft.com/office/drawing/2014/main" id="{F21364F4-9521-4628-AAFD-06762CEE86F8}"/>
+              </a:ext>
+            </a:extLst>
+          </p:cNvPr>
+          <p:cNvGraphicFramePr>
+            <a:graphicFrameLocks noGrp="1"/>
+          </p:cNvGraphicFramePr>
+          <p:nvPr>
+            <p:extLst>
+              <p:ext uri="{D42A27DB-BD31-4B8C-83A1-F6EECF244321}">
+                <p14:modId xmlns:p14="http://schemas.microsoft.com/office/powerpoint/2010/main" val="1620928618"/>
+              </p:ext>
+            </p:extLst>
+          </p:nvPr>
+        </p:nvGraphicFramePr>
+        <p:xfrm>
+          <a:off x="120503" y="937624"/>
+          <a:ext cx="8867552" cy="3953354"/>
+        </p:xfrm>
+        <a:graphic>
+          <a:graphicData uri="http://schemas.openxmlformats.org/drawingml/2006/table">
+            <a:tbl>
+              <a:tblPr>
+                <a:tableStyleId>{D113A9D2-9D6B-4929-AA2D-F23B5EE8CBE7}</a:tableStyleId>
+              </a:tblPr>
+              <a:tblGrid>
+                <a:gridCol w="1045486">
+                  <a:extLst>
+                    <a:ext uri="{9D8B030D-6E8A-4147-A177-3AD203B41FA5}">
+                      <a16:colId xmlns:a16="http://schemas.microsoft.com/office/drawing/2014/main" val="478120333"/>
+                    </a:ext>
+                  </a:extLst>
+                </a:gridCol>
+                <a:gridCol w="2770157">
+                  <a:extLst>
+                    <a:ext uri="{9D8B030D-6E8A-4147-A177-3AD203B41FA5}">
+                      <a16:colId xmlns:a16="http://schemas.microsoft.com/office/drawing/2014/main" val="2317052772"/>
+                    </a:ext>
+                  </a:extLst>
+                </a:gridCol>
+                <a:gridCol w="2835021">
+                  <a:extLst>
+                    <a:ext uri="{9D8B030D-6E8A-4147-A177-3AD203B41FA5}">
+                      <a16:colId xmlns:a16="http://schemas.microsoft.com/office/drawing/2014/main" val="3791547784"/>
+                    </a:ext>
+                  </a:extLst>
+                </a:gridCol>
+                <a:gridCol w="2216888">
+                  <a:extLst>
+                    <a:ext uri="{9D8B030D-6E8A-4147-A177-3AD203B41FA5}">
+                      <a16:colId xmlns:a16="http://schemas.microsoft.com/office/drawing/2014/main" val="3528438045"/>
+                    </a:ext>
+                  </a:extLst>
+                </a:gridCol>
+              </a:tblGrid>
+              <a:tr h="249499">
+                <a:tc>
+                  <a:txBody>
+                    <a:bodyPr/>
+                    <a:lstStyle/>
+                    <a:p>
+                      <a:r>
+                        <a:rPr lang="en-US" sz="1200" b="1"/>
+                        <a:t>Parameter</a:t>
+                      </a:r>
+                    </a:p>
+                  </a:txBody>
+                  <a:tcPr marL="50189" marR="50189" marT="25095" marB="25095" anchor="ctr">
+                    <a:lnL w="12700" cap="flat" cmpd="sng" algn="ctr">
+                      <a:solidFill>
+                        <a:schemeClr val="bg1"/>
+                      </a:solidFill>
+                      <a:prstDash val="solid"/>
+                      <a:round/>
+                      <a:headEnd type="none" w="med" len="med"/>
+                      <a:tailEnd type="none" w="med" len="med"/>
+                    </a:lnL>
+                    <a:lnR w="12700" cap="flat" cmpd="sng" algn="ctr">
+                      <a:solidFill>
+                        <a:schemeClr val="bg1"/>
+                      </a:solidFill>
+                      <a:prstDash val="solid"/>
+                      <a:round/>
+                      <a:headEnd type="none" w="med" len="med"/>
+                      <a:tailEnd type="none" w="med" len="med"/>
+                    </a:lnR>
+                    <a:lnT w="12700" cap="flat" cmpd="sng" algn="ctr">
+                      <a:solidFill>
+                        <a:schemeClr val="bg1"/>
+                      </a:solidFill>
+                      <a:prstDash val="solid"/>
+                      <a:round/>
+                      <a:headEnd type="none" w="med" len="med"/>
+                      <a:tailEnd type="none" w="med" len="med"/>
+                    </a:lnT>
+                    <a:lnB w="12700" cap="flat" cmpd="sng" algn="ctr">
+                      <a:solidFill>
+                        <a:schemeClr val="bg1"/>
+                      </a:solidFill>
+                      <a:prstDash val="solid"/>
+                      <a:round/>
+                      <a:headEnd type="none" w="med" len="med"/>
+                      <a:tailEnd type="none" w="med" len="med"/>
+                    </a:lnB>
+                  </a:tcPr>
+                </a:tc>
+                <a:tc>
+                  <a:txBody>
+                    <a:bodyPr/>
+                    <a:lstStyle/>
+                    <a:p>
+                      <a:r>
+                        <a:rPr lang="en-US" sz="1200" b="1"/>
+                        <a:t>Choices</a:t>
+                      </a:r>
+                    </a:p>
+                  </a:txBody>
+                  <a:tcPr marL="50189" marR="50189" marT="25095" marB="25095" anchor="ctr">
+                    <a:lnL w="12700" cap="flat" cmpd="sng" algn="ctr">
+                      <a:solidFill>
+                        <a:schemeClr val="bg1"/>
+                      </a:solidFill>
+                      <a:prstDash val="solid"/>
+                      <a:round/>
+                      <a:headEnd type="none" w="med" len="med"/>
+                      <a:tailEnd type="none" w="med" len="med"/>
+                    </a:lnL>
+                    <a:lnR w="12700" cap="flat" cmpd="sng" algn="ctr">
+                      <a:solidFill>
+                        <a:schemeClr val="bg1"/>
+                      </a:solidFill>
+                      <a:prstDash val="solid"/>
+                      <a:round/>
+                      <a:headEnd type="none" w="med" len="med"/>
+                      <a:tailEnd type="none" w="med" len="med"/>
+                    </a:lnR>
+                    <a:lnT w="12700" cap="flat" cmpd="sng" algn="ctr">
+                      <a:solidFill>
+                        <a:schemeClr val="bg1"/>
+                      </a:solidFill>
+                      <a:prstDash val="solid"/>
+                      <a:round/>
+                      <a:headEnd type="none" w="med" len="med"/>
+                      <a:tailEnd type="none" w="med" len="med"/>
+                    </a:lnT>
+                    <a:lnB w="12700" cap="flat" cmpd="sng" algn="ctr">
+                      <a:solidFill>
+                        <a:schemeClr val="bg1"/>
+                      </a:solidFill>
+                      <a:prstDash val="solid"/>
+                      <a:round/>
+                      <a:headEnd type="none" w="med" len="med"/>
+                      <a:tailEnd type="none" w="med" len="med"/>
+                    </a:lnB>
+                  </a:tcPr>
+                </a:tc>
+                <a:tc>
+                  <a:txBody>
+                    <a:bodyPr/>
+                    <a:lstStyle/>
+                    <a:p>
+                      <a:r>
+                        <a:rPr lang="en-US" sz="1200" b="1"/>
+                        <a:t>Description</a:t>
+                      </a:r>
+                    </a:p>
+                  </a:txBody>
+                  <a:tcPr marL="50189" marR="50189" marT="25095" marB="25095" anchor="ctr">
+                    <a:lnL w="12700" cap="flat" cmpd="sng" algn="ctr">
+                      <a:solidFill>
+                        <a:schemeClr val="bg1"/>
+                      </a:solidFill>
+                      <a:prstDash val="solid"/>
+                      <a:round/>
+                      <a:headEnd type="none" w="med" len="med"/>
+                      <a:tailEnd type="none" w="med" len="med"/>
+                    </a:lnL>
+                    <a:lnR w="12700" cap="flat" cmpd="sng" algn="ctr">
+                      <a:solidFill>
+                        <a:schemeClr val="bg1"/>
+                      </a:solidFill>
+                      <a:prstDash val="solid"/>
+                      <a:round/>
+                      <a:headEnd type="none" w="med" len="med"/>
+                      <a:tailEnd type="none" w="med" len="med"/>
+                    </a:lnR>
+                    <a:lnT w="12700" cap="flat" cmpd="sng" algn="ctr">
+                      <a:solidFill>
+                        <a:schemeClr val="bg1"/>
+                      </a:solidFill>
+                      <a:prstDash val="solid"/>
+                      <a:round/>
+                      <a:headEnd type="none" w="med" len="med"/>
+                      <a:tailEnd type="none" w="med" len="med"/>
+                    </a:lnT>
+                    <a:lnB w="12700" cap="flat" cmpd="sng" algn="ctr">
+                      <a:solidFill>
+                        <a:schemeClr val="bg1"/>
+                      </a:solidFill>
+                      <a:prstDash val="solid"/>
+                      <a:round/>
+                      <a:headEnd type="none" w="med" len="med"/>
+                      <a:tailEnd type="none" w="med" len="med"/>
+                    </a:lnB>
+                  </a:tcPr>
+                </a:tc>
+                <a:tc>
+                  <a:txBody>
+                    <a:bodyPr/>
+                    <a:lstStyle/>
+                    <a:p>
+                      <a:r>
+                        <a:rPr lang="en-US" sz="1200" b="1"/>
+                        <a:t>Example</a:t>
+                      </a:r>
+                    </a:p>
+                  </a:txBody>
+                  <a:tcPr marL="50189" marR="50189" marT="25095" marB="25095" anchor="ctr">
+                    <a:lnL w="12700" cap="flat" cmpd="sng" algn="ctr">
+                      <a:solidFill>
+                        <a:schemeClr val="bg1"/>
+                      </a:solidFill>
+                      <a:prstDash val="solid"/>
+                      <a:round/>
+                      <a:headEnd type="none" w="med" len="med"/>
+                      <a:tailEnd type="none" w="med" len="med"/>
+                    </a:lnL>
+                    <a:lnR w="12700" cap="flat" cmpd="sng" algn="ctr">
+                      <a:solidFill>
+                        <a:schemeClr val="bg1"/>
+                      </a:solidFill>
+                      <a:prstDash val="solid"/>
+                      <a:round/>
+                      <a:headEnd type="none" w="med" len="med"/>
+                      <a:tailEnd type="none" w="med" len="med"/>
+                    </a:lnR>
+                    <a:lnT w="12700" cap="flat" cmpd="sng" algn="ctr">
+                      <a:solidFill>
+                        <a:schemeClr val="bg1"/>
+                      </a:solidFill>
+                      <a:prstDash val="solid"/>
+                      <a:round/>
+                      <a:headEnd type="none" w="med" len="med"/>
+                      <a:tailEnd type="none" w="med" len="med"/>
+                    </a:lnT>
+                    <a:lnB w="12700" cap="flat" cmpd="sng" algn="ctr">
+                      <a:solidFill>
+                        <a:schemeClr val="bg1"/>
+                      </a:solidFill>
+                      <a:prstDash val="solid"/>
+                      <a:round/>
+                      <a:headEnd type="none" w="med" len="med"/>
+                      <a:tailEnd type="none" w="med" len="med"/>
+                    </a:lnB>
+                  </a:tcPr>
+                </a:tc>
+                <a:extLst>
+                  <a:ext uri="{0D108BD9-81ED-4DB2-BD59-A6C34878D82A}">
+                    <a16:rowId xmlns:a16="http://schemas.microsoft.com/office/drawing/2014/main" val="3956560026"/>
+                  </a:ext>
+                </a:extLst>
+              </a:tr>
+              <a:tr h="445271">
+                <a:tc>
+                  <a:txBody>
+                    <a:bodyPr/>
+                    <a:lstStyle/>
+                    <a:p>
+                      <a:r>
+                        <a:rPr lang="en-US" sz="1200" b="1"/>
+                        <a:t>side</a:t>
+                      </a:r>
+                    </a:p>
+                  </a:txBody>
+                  <a:tcPr marL="50189" marR="50189" marT="25095" marB="25095" anchor="ctr">
+                    <a:lnL w="12700" cap="flat" cmpd="sng" algn="ctr">
+                      <a:solidFill>
+                        <a:schemeClr val="bg1"/>
+                      </a:solidFill>
+                      <a:prstDash val="solid"/>
+                      <a:round/>
+                      <a:headEnd type="none" w="med" len="med"/>
+                      <a:tailEnd type="none" w="med" len="med"/>
+                    </a:lnL>
+                    <a:lnR w="12700" cap="flat" cmpd="sng" algn="ctr">
+                      <a:solidFill>
+                        <a:schemeClr val="bg1"/>
+                      </a:solidFill>
+                      <a:prstDash val="solid"/>
+                      <a:round/>
+                      <a:headEnd type="none" w="med" len="med"/>
+                      <a:tailEnd type="none" w="med" len="med"/>
+                    </a:lnR>
+                    <a:lnT w="12700" cap="flat" cmpd="sng" algn="ctr">
+                      <a:solidFill>
+                        <a:schemeClr val="bg1"/>
+                      </a:solidFill>
+                      <a:prstDash val="solid"/>
+                      <a:round/>
+                      <a:headEnd type="none" w="med" len="med"/>
+                      <a:tailEnd type="none" w="med" len="med"/>
+                    </a:lnT>
+                    <a:lnB w="12700" cap="flat" cmpd="sng" algn="ctr">
+                      <a:solidFill>
+                        <a:schemeClr val="bg1"/>
+                      </a:solidFill>
+                      <a:prstDash val="solid"/>
+                      <a:round/>
+                      <a:headEnd type="none" w="med" len="med"/>
+                      <a:tailEnd type="none" w="med" len="med"/>
+                    </a:lnB>
+                  </a:tcPr>
+                </a:tc>
+                <a:tc>
+                  <a:txBody>
+                    <a:bodyPr/>
+                    <a:lstStyle/>
+                    <a:p>
+                      <a:r>
+                        <a:rPr lang="en-US" sz="1200" b="1"/>
+                        <a:t>"top", "bottom", "left", "right"</a:t>
+                      </a:r>
+                    </a:p>
+                  </a:txBody>
+                  <a:tcPr marL="50189" marR="50189" marT="25095" marB="25095" anchor="ctr">
+                    <a:lnL w="12700" cap="flat" cmpd="sng" algn="ctr">
+                      <a:solidFill>
+                        <a:schemeClr val="bg1"/>
+                      </a:solidFill>
+                      <a:prstDash val="solid"/>
+                      <a:round/>
+                      <a:headEnd type="none" w="med" len="med"/>
+                      <a:tailEnd type="none" w="med" len="med"/>
+                    </a:lnL>
+                    <a:lnR w="12700" cap="flat" cmpd="sng" algn="ctr">
+                      <a:solidFill>
+                        <a:schemeClr val="bg1"/>
+                      </a:solidFill>
+                      <a:prstDash val="solid"/>
+                      <a:round/>
+                      <a:headEnd type="none" w="med" len="med"/>
+                      <a:tailEnd type="none" w="med" len="med"/>
+                    </a:lnR>
+                    <a:lnT w="12700" cap="flat" cmpd="sng" algn="ctr">
+                      <a:solidFill>
+                        <a:schemeClr val="bg1"/>
+                      </a:solidFill>
+                      <a:prstDash val="solid"/>
+                      <a:round/>
+                      <a:headEnd type="none" w="med" len="med"/>
+                      <a:tailEnd type="none" w="med" len="med"/>
+                    </a:lnT>
+                    <a:lnB w="12700" cap="flat" cmpd="sng" algn="ctr">
+                      <a:solidFill>
+                        <a:schemeClr val="bg1"/>
+                      </a:solidFill>
+                      <a:prstDash val="solid"/>
+                      <a:round/>
+                      <a:headEnd type="none" w="med" len="med"/>
+                      <a:tailEnd type="none" w="med" len="med"/>
+                    </a:lnB>
+                  </a:tcPr>
+                </a:tc>
+                <a:tc>
+                  <a:txBody>
+                    <a:bodyPr/>
+                    <a:lstStyle/>
+                    <a:p>
+                      <a:r>
+                        <a:rPr lang="en-US" sz="1200" b="1"/>
+                        <a:t>Specifies which side of the parent the widget is packed against.</a:t>
+                      </a:r>
+                    </a:p>
+                  </a:txBody>
+                  <a:tcPr marL="50189" marR="50189" marT="25095" marB="25095" anchor="ctr">
+                    <a:lnL w="12700" cap="flat" cmpd="sng" algn="ctr">
+                      <a:solidFill>
+                        <a:schemeClr val="bg1"/>
+                      </a:solidFill>
+                      <a:prstDash val="solid"/>
+                      <a:round/>
+                      <a:headEnd type="none" w="med" len="med"/>
+                      <a:tailEnd type="none" w="med" len="med"/>
+                    </a:lnL>
+                    <a:lnR w="12700" cap="flat" cmpd="sng" algn="ctr">
+                      <a:solidFill>
+                        <a:schemeClr val="bg1"/>
+                      </a:solidFill>
+                      <a:prstDash val="solid"/>
+                      <a:round/>
+                      <a:headEnd type="none" w="med" len="med"/>
+                      <a:tailEnd type="none" w="med" len="med"/>
+                    </a:lnR>
+                    <a:lnT w="12700" cap="flat" cmpd="sng" algn="ctr">
+                      <a:solidFill>
+                        <a:schemeClr val="bg1"/>
+                      </a:solidFill>
+                      <a:prstDash val="solid"/>
+                      <a:round/>
+                      <a:headEnd type="none" w="med" len="med"/>
+                      <a:tailEnd type="none" w="med" len="med"/>
+                    </a:lnT>
+                    <a:lnB w="12700" cap="flat" cmpd="sng" algn="ctr">
+                      <a:solidFill>
+                        <a:schemeClr val="bg1"/>
+                      </a:solidFill>
+                      <a:prstDash val="solid"/>
+                      <a:round/>
+                      <a:headEnd type="none" w="med" len="med"/>
+                      <a:tailEnd type="none" w="med" len="med"/>
+                    </a:lnB>
+                  </a:tcPr>
+                </a:tc>
+                <a:tc>
+                  <a:txBody>
+                    <a:bodyPr/>
+                    <a:lstStyle/>
+                    <a:p>
+                      <a:r>
+                        <a:rPr lang="en-US" sz="1200" b="1"/>
+                        <a:t>pack(side="left")</a:t>
+                      </a:r>
+                    </a:p>
+                  </a:txBody>
+                  <a:tcPr marL="50189" marR="50189" marT="25095" marB="25095" anchor="ctr">
+                    <a:lnL w="12700" cap="flat" cmpd="sng" algn="ctr">
+                      <a:solidFill>
+                        <a:schemeClr val="bg1"/>
+                      </a:solidFill>
+                      <a:prstDash val="solid"/>
+                      <a:round/>
+                      <a:headEnd type="none" w="med" len="med"/>
+                      <a:tailEnd type="none" w="med" len="med"/>
+                    </a:lnL>
+                    <a:lnR w="12700" cap="flat" cmpd="sng" algn="ctr">
+                      <a:solidFill>
+                        <a:schemeClr val="bg1"/>
+                      </a:solidFill>
+                      <a:prstDash val="solid"/>
+                      <a:round/>
+                      <a:headEnd type="none" w="med" len="med"/>
+                      <a:tailEnd type="none" w="med" len="med"/>
+                    </a:lnR>
+                    <a:lnT w="12700" cap="flat" cmpd="sng" algn="ctr">
+                      <a:solidFill>
+                        <a:schemeClr val="bg1"/>
+                      </a:solidFill>
+                      <a:prstDash val="solid"/>
+                      <a:round/>
+                      <a:headEnd type="none" w="med" len="med"/>
+                      <a:tailEnd type="none" w="med" len="med"/>
+                    </a:lnT>
+                    <a:lnB w="12700" cap="flat" cmpd="sng" algn="ctr">
+                      <a:solidFill>
+                        <a:schemeClr val="bg1"/>
+                      </a:solidFill>
+                      <a:prstDash val="solid"/>
+                      <a:round/>
+                      <a:headEnd type="none" w="med" len="med"/>
+                      <a:tailEnd type="none" w="med" len="med"/>
+                    </a:lnB>
+                  </a:tcPr>
+                </a:tc>
+                <a:extLst>
+                  <a:ext uri="{0D108BD9-81ED-4DB2-BD59-A6C34878D82A}">
+                    <a16:rowId xmlns:a16="http://schemas.microsoft.com/office/drawing/2014/main" val="238745769"/>
+                  </a:ext>
+                </a:extLst>
+              </a:tr>
+              <a:tr h="295500">
+                <a:tc>
+                  <a:txBody>
+                    <a:bodyPr/>
+                    <a:lstStyle/>
+                    <a:p>
+                      <a:r>
+                        <a:rPr lang="en-US" sz="1200" b="1"/>
+                        <a:t>fill</a:t>
+                      </a:r>
+                    </a:p>
+                  </a:txBody>
+                  <a:tcPr marL="50189" marR="50189" marT="25095" marB="25095" anchor="ctr">
+                    <a:lnL w="12700" cap="flat" cmpd="sng" algn="ctr">
+                      <a:solidFill>
+                        <a:schemeClr val="bg1"/>
+                      </a:solidFill>
+                      <a:prstDash val="solid"/>
+                      <a:round/>
+                      <a:headEnd type="none" w="med" len="med"/>
+                      <a:tailEnd type="none" w="med" len="med"/>
+                    </a:lnL>
+                    <a:lnR w="12700" cap="flat" cmpd="sng" algn="ctr">
+                      <a:solidFill>
+                        <a:schemeClr val="bg1"/>
+                      </a:solidFill>
+                      <a:prstDash val="solid"/>
+                      <a:round/>
+                      <a:headEnd type="none" w="med" len="med"/>
+                      <a:tailEnd type="none" w="med" len="med"/>
+                    </a:lnR>
+                    <a:lnT w="12700" cap="flat" cmpd="sng" algn="ctr">
+                      <a:solidFill>
+                        <a:schemeClr val="bg1"/>
+                      </a:solidFill>
+                      <a:prstDash val="solid"/>
+                      <a:round/>
+                      <a:headEnd type="none" w="med" len="med"/>
+                      <a:tailEnd type="none" w="med" len="med"/>
+                    </a:lnT>
+                    <a:lnB w="12700" cap="flat" cmpd="sng" algn="ctr">
+                      <a:solidFill>
+                        <a:schemeClr val="bg1"/>
+                      </a:solidFill>
+                      <a:prstDash val="solid"/>
+                      <a:round/>
+                      <a:headEnd type="none" w="med" len="med"/>
+                      <a:tailEnd type="none" w="med" len="med"/>
+                    </a:lnB>
+                  </a:tcPr>
+                </a:tc>
+                <a:tc>
+                  <a:txBody>
+                    <a:bodyPr/>
+                    <a:lstStyle/>
+                    <a:p>
+                      <a:r>
+                        <a:rPr lang="en-US" sz="1200" b="1"/>
+                        <a:t>"x", "y", "both", "none" (default)</a:t>
+                      </a:r>
+                    </a:p>
+                  </a:txBody>
+                  <a:tcPr marL="50189" marR="50189" marT="25095" marB="25095" anchor="ctr">
+                    <a:lnL w="12700" cap="flat" cmpd="sng" algn="ctr">
+                      <a:solidFill>
+                        <a:schemeClr val="bg1"/>
+                      </a:solidFill>
+                      <a:prstDash val="solid"/>
+                      <a:round/>
+                      <a:headEnd type="none" w="med" len="med"/>
+                      <a:tailEnd type="none" w="med" len="med"/>
+                    </a:lnL>
+                    <a:lnR w="12700" cap="flat" cmpd="sng" algn="ctr">
+                      <a:solidFill>
+                        <a:schemeClr val="bg1"/>
+                      </a:solidFill>
+                      <a:prstDash val="solid"/>
+                      <a:round/>
+                      <a:headEnd type="none" w="med" len="med"/>
+                      <a:tailEnd type="none" w="med" len="med"/>
+                    </a:lnR>
+                    <a:lnT w="12700" cap="flat" cmpd="sng" algn="ctr">
+                      <a:solidFill>
+                        <a:schemeClr val="bg1"/>
+                      </a:solidFill>
+                      <a:prstDash val="solid"/>
+                      <a:round/>
+                      <a:headEnd type="none" w="med" len="med"/>
+                      <a:tailEnd type="none" w="med" len="med"/>
+                    </a:lnT>
+                    <a:lnB w="12700" cap="flat" cmpd="sng" algn="ctr">
+                      <a:solidFill>
+                        <a:schemeClr val="bg1"/>
+                      </a:solidFill>
+                      <a:prstDash val="solid"/>
+                      <a:round/>
+                      <a:headEnd type="none" w="med" len="med"/>
+                      <a:tailEnd type="none" w="med" len="med"/>
+                    </a:lnB>
+                  </a:tcPr>
+                </a:tc>
+                <a:tc>
+                  <a:txBody>
+                    <a:bodyPr/>
+                    <a:lstStyle/>
+                    <a:p>
+                      <a:r>
+                        <a:rPr lang="en-US" sz="1200" b="1"/>
+                        <a:t>Stretches the widget to fill available space.</a:t>
+                      </a:r>
+                    </a:p>
+                  </a:txBody>
+                  <a:tcPr marL="50189" marR="50189" marT="25095" marB="25095" anchor="ctr">
+                    <a:lnL w="12700" cap="flat" cmpd="sng" algn="ctr">
+                      <a:solidFill>
+                        <a:schemeClr val="bg1"/>
+                      </a:solidFill>
+                      <a:prstDash val="solid"/>
+                      <a:round/>
+                      <a:headEnd type="none" w="med" len="med"/>
+                      <a:tailEnd type="none" w="med" len="med"/>
+                    </a:lnL>
+                    <a:lnR w="12700" cap="flat" cmpd="sng" algn="ctr">
+                      <a:solidFill>
+                        <a:schemeClr val="bg1"/>
+                      </a:solidFill>
+                      <a:prstDash val="solid"/>
+                      <a:round/>
+                      <a:headEnd type="none" w="med" len="med"/>
+                      <a:tailEnd type="none" w="med" len="med"/>
+                    </a:lnR>
+                    <a:lnT w="12700" cap="flat" cmpd="sng" algn="ctr">
+                      <a:solidFill>
+                        <a:schemeClr val="bg1"/>
+                      </a:solidFill>
+                      <a:prstDash val="solid"/>
+                      <a:round/>
+                      <a:headEnd type="none" w="med" len="med"/>
+                      <a:tailEnd type="none" w="med" len="med"/>
+                    </a:lnT>
+                    <a:lnB w="12700" cap="flat" cmpd="sng" algn="ctr">
+                      <a:solidFill>
+                        <a:schemeClr val="bg1"/>
+                      </a:solidFill>
+                      <a:prstDash val="solid"/>
+                      <a:round/>
+                      <a:headEnd type="none" w="med" len="med"/>
+                      <a:tailEnd type="none" w="med" len="med"/>
+                    </a:lnB>
+                  </a:tcPr>
+                </a:tc>
+                <a:tc>
+                  <a:txBody>
+                    <a:bodyPr/>
+                    <a:lstStyle/>
+                    <a:p>
+                      <a:r>
+                        <a:rPr lang="en-US" sz="1200" b="1"/>
+                        <a:t>pack(fill="x")</a:t>
+                      </a:r>
+                    </a:p>
+                  </a:txBody>
+                  <a:tcPr marL="50189" marR="50189" marT="25095" marB="25095" anchor="ctr">
+                    <a:lnL w="12700" cap="flat" cmpd="sng" algn="ctr">
+                      <a:solidFill>
+                        <a:schemeClr val="bg1"/>
+                      </a:solidFill>
+                      <a:prstDash val="solid"/>
+                      <a:round/>
+                      <a:headEnd type="none" w="med" len="med"/>
+                      <a:tailEnd type="none" w="med" len="med"/>
+                    </a:lnL>
+                    <a:lnR w="12700" cap="flat" cmpd="sng" algn="ctr">
+                      <a:solidFill>
+                        <a:schemeClr val="bg1"/>
+                      </a:solidFill>
+                      <a:prstDash val="solid"/>
+                      <a:round/>
+                      <a:headEnd type="none" w="med" len="med"/>
+                      <a:tailEnd type="none" w="med" len="med"/>
+                    </a:lnR>
+                    <a:lnT w="12700" cap="flat" cmpd="sng" algn="ctr">
+                      <a:solidFill>
+                        <a:schemeClr val="bg1"/>
+                      </a:solidFill>
+                      <a:prstDash val="solid"/>
+                      <a:round/>
+                      <a:headEnd type="none" w="med" len="med"/>
+                      <a:tailEnd type="none" w="med" len="med"/>
+                    </a:lnT>
+                    <a:lnB w="12700" cap="flat" cmpd="sng" algn="ctr">
+                      <a:solidFill>
+                        <a:schemeClr val="bg1"/>
+                      </a:solidFill>
+                      <a:prstDash val="solid"/>
+                      <a:round/>
+                      <a:headEnd type="none" w="med" len="med"/>
+                      <a:tailEnd type="none" w="med" len="med"/>
+                    </a:lnB>
+                  </a:tcPr>
+                </a:tc>
+                <a:extLst>
+                  <a:ext uri="{0D108BD9-81ED-4DB2-BD59-A6C34878D82A}">
+                    <a16:rowId xmlns:a16="http://schemas.microsoft.com/office/drawing/2014/main" val="1913857687"/>
+                  </a:ext>
+                </a:extLst>
+              </a:tr>
+              <a:tr h="445271">
+                <a:tc>
+                  <a:txBody>
+                    <a:bodyPr/>
+                    <a:lstStyle/>
+                    <a:p>
+                      <a:r>
+                        <a:rPr lang="en-US" sz="1200" b="1"/>
+                        <a:t>expand</a:t>
+                      </a:r>
+                    </a:p>
+                  </a:txBody>
+                  <a:tcPr marL="50189" marR="50189" marT="25095" marB="25095" anchor="ctr">
+                    <a:lnL w="12700" cap="flat" cmpd="sng" algn="ctr">
+                      <a:solidFill>
+                        <a:schemeClr val="bg1"/>
+                      </a:solidFill>
+                      <a:prstDash val="solid"/>
+                      <a:round/>
+                      <a:headEnd type="none" w="med" len="med"/>
+                      <a:tailEnd type="none" w="med" len="med"/>
+                    </a:lnL>
+                    <a:lnR w="12700" cap="flat" cmpd="sng" algn="ctr">
+                      <a:solidFill>
+                        <a:schemeClr val="bg1"/>
+                      </a:solidFill>
+                      <a:prstDash val="solid"/>
+                      <a:round/>
+                      <a:headEnd type="none" w="med" len="med"/>
+                      <a:tailEnd type="none" w="med" len="med"/>
+                    </a:lnR>
+                    <a:lnT w="12700" cap="flat" cmpd="sng" algn="ctr">
+                      <a:solidFill>
+                        <a:schemeClr val="bg1"/>
+                      </a:solidFill>
+                      <a:prstDash val="solid"/>
+                      <a:round/>
+                      <a:headEnd type="none" w="med" len="med"/>
+                      <a:tailEnd type="none" w="med" len="med"/>
+                    </a:lnT>
+                    <a:lnB w="12700" cap="flat" cmpd="sng" algn="ctr">
+                      <a:solidFill>
+                        <a:schemeClr val="bg1"/>
+                      </a:solidFill>
+                      <a:prstDash val="solid"/>
+                      <a:round/>
+                      <a:headEnd type="none" w="med" len="med"/>
+                      <a:tailEnd type="none" w="med" len="med"/>
+                    </a:lnB>
+                  </a:tcPr>
+                </a:tc>
+                <a:tc>
+                  <a:txBody>
+                    <a:bodyPr/>
+                    <a:lstStyle/>
+                    <a:p>
+                      <a:r>
+                        <a:rPr lang="en-US" sz="1200" b="1"/>
+                        <a:t>True, False</a:t>
+                      </a:r>
+                    </a:p>
+                  </a:txBody>
+                  <a:tcPr marL="50189" marR="50189" marT="25095" marB="25095" anchor="ctr">
+                    <a:lnL w="12700" cap="flat" cmpd="sng" algn="ctr">
+                      <a:solidFill>
+                        <a:schemeClr val="bg1"/>
+                      </a:solidFill>
+                      <a:prstDash val="solid"/>
+                      <a:round/>
+                      <a:headEnd type="none" w="med" len="med"/>
+                      <a:tailEnd type="none" w="med" len="med"/>
+                    </a:lnL>
+                    <a:lnR w="12700" cap="flat" cmpd="sng" algn="ctr">
+                      <a:solidFill>
+                        <a:schemeClr val="bg1"/>
+                      </a:solidFill>
+                      <a:prstDash val="solid"/>
+                      <a:round/>
+                      <a:headEnd type="none" w="med" len="med"/>
+                      <a:tailEnd type="none" w="med" len="med"/>
+                    </a:lnR>
+                    <a:lnT w="12700" cap="flat" cmpd="sng" algn="ctr">
+                      <a:solidFill>
+                        <a:schemeClr val="bg1"/>
+                      </a:solidFill>
+                      <a:prstDash val="solid"/>
+                      <a:round/>
+                      <a:headEnd type="none" w="med" len="med"/>
+                      <a:tailEnd type="none" w="med" len="med"/>
+                    </a:lnT>
+                    <a:lnB w="12700" cap="flat" cmpd="sng" algn="ctr">
+                      <a:solidFill>
+                        <a:schemeClr val="bg1"/>
+                      </a:solidFill>
+                      <a:prstDash val="solid"/>
+                      <a:round/>
+                      <a:headEnd type="none" w="med" len="med"/>
+                      <a:tailEnd type="none" w="med" len="med"/>
+                    </a:lnB>
+                  </a:tcPr>
+                </a:tc>
+                <a:tc>
+                  <a:txBody>
+                    <a:bodyPr/>
+                    <a:lstStyle/>
+                    <a:p>
+                      <a:r>
+                        <a:rPr lang="en-US" sz="1200" b="1"/>
+                        <a:t>Allows the widget to use any extra space in the parent.</a:t>
+                      </a:r>
+                    </a:p>
+                  </a:txBody>
+                  <a:tcPr marL="50189" marR="50189" marT="25095" marB="25095" anchor="ctr">
+                    <a:lnL w="12700" cap="flat" cmpd="sng" algn="ctr">
+                      <a:solidFill>
+                        <a:schemeClr val="bg1"/>
+                      </a:solidFill>
+                      <a:prstDash val="solid"/>
+                      <a:round/>
+                      <a:headEnd type="none" w="med" len="med"/>
+                      <a:tailEnd type="none" w="med" len="med"/>
+                    </a:lnL>
+                    <a:lnR w="12700" cap="flat" cmpd="sng" algn="ctr">
+                      <a:solidFill>
+                        <a:schemeClr val="bg1"/>
+                      </a:solidFill>
+                      <a:prstDash val="solid"/>
+                      <a:round/>
+                      <a:headEnd type="none" w="med" len="med"/>
+                      <a:tailEnd type="none" w="med" len="med"/>
+                    </a:lnR>
+                    <a:lnT w="12700" cap="flat" cmpd="sng" algn="ctr">
+                      <a:solidFill>
+                        <a:schemeClr val="bg1"/>
+                      </a:solidFill>
+                      <a:prstDash val="solid"/>
+                      <a:round/>
+                      <a:headEnd type="none" w="med" len="med"/>
+                      <a:tailEnd type="none" w="med" len="med"/>
+                    </a:lnT>
+                    <a:lnB w="12700" cap="flat" cmpd="sng" algn="ctr">
+                      <a:solidFill>
+                        <a:schemeClr val="bg1"/>
+                      </a:solidFill>
+                      <a:prstDash val="solid"/>
+                      <a:round/>
+                      <a:headEnd type="none" w="med" len="med"/>
+                      <a:tailEnd type="none" w="med" len="med"/>
+                    </a:lnB>
+                  </a:tcPr>
+                </a:tc>
+                <a:tc>
+                  <a:txBody>
+                    <a:bodyPr/>
+                    <a:lstStyle/>
+                    <a:p>
+                      <a:r>
+                        <a:rPr lang="en-US" sz="1200" b="1"/>
+                        <a:t>pack(expand=True)</a:t>
+                      </a:r>
+                    </a:p>
+                  </a:txBody>
+                  <a:tcPr marL="50189" marR="50189" marT="25095" marB="25095" anchor="ctr">
+                    <a:lnL w="12700" cap="flat" cmpd="sng" algn="ctr">
+                      <a:solidFill>
+                        <a:schemeClr val="bg1"/>
+                      </a:solidFill>
+                      <a:prstDash val="solid"/>
+                      <a:round/>
+                      <a:headEnd type="none" w="med" len="med"/>
+                      <a:tailEnd type="none" w="med" len="med"/>
+                    </a:lnL>
+                    <a:lnR w="12700" cap="flat" cmpd="sng" algn="ctr">
+                      <a:solidFill>
+                        <a:schemeClr val="bg1"/>
+                      </a:solidFill>
+                      <a:prstDash val="solid"/>
+                      <a:round/>
+                      <a:headEnd type="none" w="med" len="med"/>
+                      <a:tailEnd type="none" w="med" len="med"/>
+                    </a:lnR>
+                    <a:lnT w="12700" cap="flat" cmpd="sng" algn="ctr">
+                      <a:solidFill>
+                        <a:schemeClr val="bg1"/>
+                      </a:solidFill>
+                      <a:prstDash val="solid"/>
+                      <a:round/>
+                      <a:headEnd type="none" w="med" len="med"/>
+                      <a:tailEnd type="none" w="med" len="med"/>
+                    </a:lnT>
+                    <a:lnB w="12700" cap="flat" cmpd="sng" algn="ctr">
+                      <a:solidFill>
+                        <a:schemeClr val="bg1"/>
+                      </a:solidFill>
+                      <a:prstDash val="solid"/>
+                      <a:round/>
+                      <a:headEnd type="none" w="med" len="med"/>
+                      <a:tailEnd type="none" w="med" len="med"/>
+                    </a:lnB>
+                  </a:tcPr>
+                </a:tc>
+                <a:extLst>
+                  <a:ext uri="{0D108BD9-81ED-4DB2-BD59-A6C34878D82A}">
+                    <a16:rowId xmlns:a16="http://schemas.microsoft.com/office/drawing/2014/main" val="1095142222"/>
+                  </a:ext>
+                </a:extLst>
+              </a:tr>
+              <a:tr h="445271">
+                <a:tc>
+                  <a:txBody>
+                    <a:bodyPr/>
+                    <a:lstStyle/>
+                    <a:p>
+                      <a:r>
+                        <a:rPr lang="en-US" sz="1200" b="1"/>
+                        <a:t>anchor</a:t>
+                      </a:r>
+                    </a:p>
+                  </a:txBody>
+                  <a:tcPr marL="50189" marR="50189" marT="25095" marB="25095" anchor="ctr">
+                    <a:lnL w="12700" cap="flat" cmpd="sng" algn="ctr">
+                      <a:solidFill>
+                        <a:schemeClr val="bg1"/>
+                      </a:solidFill>
+                      <a:prstDash val="solid"/>
+                      <a:round/>
+                      <a:headEnd type="none" w="med" len="med"/>
+                      <a:tailEnd type="none" w="med" len="med"/>
+                    </a:lnL>
+                    <a:lnR w="12700" cap="flat" cmpd="sng" algn="ctr">
+                      <a:solidFill>
+                        <a:schemeClr val="bg1"/>
+                      </a:solidFill>
+                      <a:prstDash val="solid"/>
+                      <a:round/>
+                      <a:headEnd type="none" w="med" len="med"/>
+                      <a:tailEnd type="none" w="med" len="med"/>
+                    </a:lnR>
+                    <a:lnT w="12700" cap="flat" cmpd="sng" algn="ctr">
+                      <a:solidFill>
+                        <a:schemeClr val="bg1"/>
+                      </a:solidFill>
+                      <a:prstDash val="solid"/>
+                      <a:round/>
+                      <a:headEnd type="none" w="med" len="med"/>
+                      <a:tailEnd type="none" w="med" len="med"/>
+                    </a:lnT>
+                    <a:lnB w="12700" cap="flat" cmpd="sng" algn="ctr">
+                      <a:solidFill>
+                        <a:schemeClr val="bg1"/>
+                      </a:solidFill>
+                      <a:prstDash val="solid"/>
+                      <a:round/>
+                      <a:headEnd type="none" w="med" len="med"/>
+                      <a:tailEnd type="none" w="med" len="med"/>
+                    </a:lnB>
+                  </a:tcPr>
+                </a:tc>
+                <a:tc>
+                  <a:txBody>
+                    <a:bodyPr/>
+                    <a:lstStyle/>
+                    <a:p>
+                      <a:r>
+                        <a:rPr lang="pt-BR" sz="1200" b="1"/>
+                        <a:t>"n", "s", "e", "w", "ne", "nw", "se", "sw", "center"</a:t>
+                      </a:r>
+                    </a:p>
+                  </a:txBody>
+                  <a:tcPr marL="50189" marR="50189" marT="25095" marB="25095" anchor="ctr">
+                    <a:lnL w="12700" cap="flat" cmpd="sng" algn="ctr">
+                      <a:solidFill>
+                        <a:schemeClr val="bg1"/>
+                      </a:solidFill>
+                      <a:prstDash val="solid"/>
+                      <a:round/>
+                      <a:headEnd type="none" w="med" len="med"/>
+                      <a:tailEnd type="none" w="med" len="med"/>
+                    </a:lnL>
+                    <a:lnR w="12700" cap="flat" cmpd="sng" algn="ctr">
+                      <a:solidFill>
+                        <a:schemeClr val="bg1"/>
+                      </a:solidFill>
+                      <a:prstDash val="solid"/>
+                      <a:round/>
+                      <a:headEnd type="none" w="med" len="med"/>
+                      <a:tailEnd type="none" w="med" len="med"/>
+                    </a:lnR>
+                    <a:lnT w="12700" cap="flat" cmpd="sng" algn="ctr">
+                      <a:solidFill>
+                        <a:schemeClr val="bg1"/>
+                      </a:solidFill>
+                      <a:prstDash val="solid"/>
+                      <a:round/>
+                      <a:headEnd type="none" w="med" len="med"/>
+                      <a:tailEnd type="none" w="med" len="med"/>
+                    </a:lnT>
+                    <a:lnB w="12700" cap="flat" cmpd="sng" algn="ctr">
+                      <a:solidFill>
+                        <a:schemeClr val="bg1"/>
+                      </a:solidFill>
+                      <a:prstDash val="solid"/>
+                      <a:round/>
+                      <a:headEnd type="none" w="med" len="med"/>
+                      <a:tailEnd type="none" w="med" len="med"/>
+                    </a:lnB>
+                  </a:tcPr>
+                </a:tc>
+                <a:tc>
+                  <a:txBody>
+                    <a:bodyPr/>
+                    <a:lstStyle/>
+                    <a:p>
+                      <a:r>
+                        <a:rPr lang="en-US" sz="1200" b="1"/>
+                        <a:t>Positions the widget inside the available space.</a:t>
+                      </a:r>
+                    </a:p>
+                  </a:txBody>
+                  <a:tcPr marL="50189" marR="50189" marT="25095" marB="25095" anchor="ctr">
+                    <a:lnL w="12700" cap="flat" cmpd="sng" algn="ctr">
+                      <a:solidFill>
+                        <a:schemeClr val="bg1"/>
+                      </a:solidFill>
+                      <a:prstDash val="solid"/>
+                      <a:round/>
+                      <a:headEnd type="none" w="med" len="med"/>
+                      <a:tailEnd type="none" w="med" len="med"/>
+                    </a:lnL>
+                    <a:lnR w="12700" cap="flat" cmpd="sng" algn="ctr">
+                      <a:solidFill>
+                        <a:schemeClr val="bg1"/>
+                      </a:solidFill>
+                      <a:prstDash val="solid"/>
+                      <a:round/>
+                      <a:headEnd type="none" w="med" len="med"/>
+                      <a:tailEnd type="none" w="med" len="med"/>
+                    </a:lnR>
+                    <a:lnT w="12700" cap="flat" cmpd="sng" algn="ctr">
+                      <a:solidFill>
+                        <a:schemeClr val="bg1"/>
+                      </a:solidFill>
+                      <a:prstDash val="solid"/>
+                      <a:round/>
+                      <a:headEnd type="none" w="med" len="med"/>
+                      <a:tailEnd type="none" w="med" len="med"/>
+                    </a:lnT>
+                    <a:lnB w="12700" cap="flat" cmpd="sng" algn="ctr">
+                      <a:solidFill>
+                        <a:schemeClr val="bg1"/>
+                      </a:solidFill>
+                      <a:prstDash val="solid"/>
+                      <a:round/>
+                      <a:headEnd type="none" w="med" len="med"/>
+                      <a:tailEnd type="none" w="med" len="med"/>
+                    </a:lnB>
+                  </a:tcPr>
+                </a:tc>
+                <a:tc>
+                  <a:txBody>
+                    <a:bodyPr/>
+                    <a:lstStyle/>
+                    <a:p>
+                      <a:r>
+                        <a:rPr lang="en-US" sz="1200" b="1"/>
+                        <a:t>pack(anchor="nw")</a:t>
+                      </a:r>
+                    </a:p>
+                  </a:txBody>
+                  <a:tcPr marL="50189" marR="50189" marT="25095" marB="25095" anchor="ctr">
+                    <a:lnL w="12700" cap="flat" cmpd="sng" algn="ctr">
+                      <a:solidFill>
+                        <a:schemeClr val="bg1"/>
+                      </a:solidFill>
+                      <a:prstDash val="solid"/>
+                      <a:round/>
+                      <a:headEnd type="none" w="med" len="med"/>
+                      <a:tailEnd type="none" w="med" len="med"/>
+                    </a:lnL>
+                    <a:lnR w="12700" cap="flat" cmpd="sng" algn="ctr">
+                      <a:solidFill>
+                        <a:schemeClr val="bg1"/>
+                      </a:solidFill>
+                      <a:prstDash val="solid"/>
+                      <a:round/>
+                      <a:headEnd type="none" w="med" len="med"/>
+                      <a:tailEnd type="none" w="med" len="med"/>
+                    </a:lnR>
+                    <a:lnT w="12700" cap="flat" cmpd="sng" algn="ctr">
+                      <a:solidFill>
+                        <a:schemeClr val="bg1"/>
+                      </a:solidFill>
+                      <a:prstDash val="solid"/>
+                      <a:round/>
+                      <a:headEnd type="none" w="med" len="med"/>
+                      <a:tailEnd type="none" w="med" len="med"/>
+                    </a:lnT>
+                    <a:lnB w="12700" cap="flat" cmpd="sng" algn="ctr">
+                      <a:solidFill>
+                        <a:schemeClr val="bg1"/>
+                      </a:solidFill>
+                      <a:prstDash val="solid"/>
+                      <a:round/>
+                      <a:headEnd type="none" w="med" len="med"/>
+                      <a:tailEnd type="none" w="med" len="med"/>
+                    </a:lnB>
+                  </a:tcPr>
+                </a:tc>
+                <a:extLst>
+                  <a:ext uri="{0D108BD9-81ED-4DB2-BD59-A6C34878D82A}">
+                    <a16:rowId xmlns:a16="http://schemas.microsoft.com/office/drawing/2014/main" val="779057254"/>
+                  </a:ext>
+                </a:extLst>
+              </a:tr>
+              <a:tr h="295500">
+                <a:tc>
+                  <a:txBody>
+                    <a:bodyPr/>
+                    <a:lstStyle/>
+                    <a:p>
+                      <a:r>
+                        <a:rPr lang="en-US" sz="1200" b="1"/>
+                        <a:t>padx</a:t>
+                      </a:r>
+                    </a:p>
+                  </a:txBody>
+                  <a:tcPr marL="50189" marR="50189" marT="25095" marB="25095" anchor="ctr">
+                    <a:lnL w="12700" cap="flat" cmpd="sng" algn="ctr">
+                      <a:solidFill>
+                        <a:schemeClr val="bg1"/>
+                      </a:solidFill>
+                      <a:prstDash val="solid"/>
+                      <a:round/>
+                      <a:headEnd type="none" w="med" len="med"/>
+                      <a:tailEnd type="none" w="med" len="med"/>
+                    </a:lnL>
+                    <a:lnR w="12700" cap="flat" cmpd="sng" algn="ctr">
+                      <a:solidFill>
+                        <a:schemeClr val="bg1"/>
+                      </a:solidFill>
+                      <a:prstDash val="solid"/>
+                      <a:round/>
+                      <a:headEnd type="none" w="med" len="med"/>
+                      <a:tailEnd type="none" w="med" len="med"/>
+                    </a:lnR>
+                    <a:lnT w="12700" cap="flat" cmpd="sng" algn="ctr">
+                      <a:solidFill>
+                        <a:schemeClr val="bg1"/>
+                      </a:solidFill>
+                      <a:prstDash val="solid"/>
+                      <a:round/>
+                      <a:headEnd type="none" w="med" len="med"/>
+                      <a:tailEnd type="none" w="med" len="med"/>
+                    </a:lnT>
+                    <a:lnB w="12700" cap="flat" cmpd="sng" algn="ctr">
+                      <a:solidFill>
+                        <a:schemeClr val="bg1"/>
+                      </a:solidFill>
+                      <a:prstDash val="solid"/>
+                      <a:round/>
+                      <a:headEnd type="none" w="med" len="med"/>
+                      <a:tailEnd type="none" w="med" len="med"/>
+                    </a:lnB>
+                  </a:tcPr>
+                </a:tc>
+                <a:tc>
+                  <a:txBody>
+                    <a:bodyPr/>
+                    <a:lstStyle/>
+                    <a:p>
+                      <a:r>
+                        <a:rPr lang="en-US" sz="1200" b="1"/>
+                        <a:t>Integer (0, 10, 20, ...)</a:t>
+                      </a:r>
+                    </a:p>
+                  </a:txBody>
+                  <a:tcPr marL="50189" marR="50189" marT="25095" marB="25095" anchor="ctr">
+                    <a:lnL w="12700" cap="flat" cmpd="sng" algn="ctr">
+                      <a:solidFill>
+                        <a:schemeClr val="bg1"/>
+                      </a:solidFill>
+                      <a:prstDash val="solid"/>
+                      <a:round/>
+                      <a:headEnd type="none" w="med" len="med"/>
+                      <a:tailEnd type="none" w="med" len="med"/>
+                    </a:lnL>
+                    <a:lnR w="12700" cap="flat" cmpd="sng" algn="ctr">
+                      <a:solidFill>
+                        <a:schemeClr val="bg1"/>
+                      </a:solidFill>
+                      <a:prstDash val="solid"/>
+                      <a:round/>
+                      <a:headEnd type="none" w="med" len="med"/>
+                      <a:tailEnd type="none" w="med" len="med"/>
+                    </a:lnR>
+                    <a:lnT w="12700" cap="flat" cmpd="sng" algn="ctr">
+                      <a:solidFill>
+                        <a:schemeClr val="bg1"/>
+                      </a:solidFill>
+                      <a:prstDash val="solid"/>
+                      <a:round/>
+                      <a:headEnd type="none" w="med" len="med"/>
+                      <a:tailEnd type="none" w="med" len="med"/>
+                    </a:lnT>
+                    <a:lnB w="12700" cap="flat" cmpd="sng" algn="ctr">
+                      <a:solidFill>
+                        <a:schemeClr val="bg1"/>
+                      </a:solidFill>
+                      <a:prstDash val="solid"/>
+                      <a:round/>
+                      <a:headEnd type="none" w="med" len="med"/>
+                      <a:tailEnd type="none" w="med" len="med"/>
+                    </a:lnB>
+                  </a:tcPr>
+                </a:tc>
+                <a:tc>
+                  <a:txBody>
+                    <a:bodyPr/>
+                    <a:lstStyle/>
+                    <a:p>
+                      <a:r>
+                        <a:rPr lang="en-US" sz="1200" b="1"/>
+                        <a:t>Adds horizontal space outside the widget.</a:t>
+                      </a:r>
+                    </a:p>
+                  </a:txBody>
+                  <a:tcPr marL="50189" marR="50189" marT="25095" marB="25095" anchor="ctr">
+                    <a:lnL w="12700" cap="flat" cmpd="sng" algn="ctr">
+                      <a:solidFill>
+                        <a:schemeClr val="bg1"/>
+                      </a:solidFill>
+                      <a:prstDash val="solid"/>
+                      <a:round/>
+                      <a:headEnd type="none" w="med" len="med"/>
+                      <a:tailEnd type="none" w="med" len="med"/>
+                    </a:lnL>
+                    <a:lnR w="12700" cap="flat" cmpd="sng" algn="ctr">
+                      <a:solidFill>
+                        <a:schemeClr val="bg1"/>
+                      </a:solidFill>
+                      <a:prstDash val="solid"/>
+                      <a:round/>
+                      <a:headEnd type="none" w="med" len="med"/>
+                      <a:tailEnd type="none" w="med" len="med"/>
+                    </a:lnR>
+                    <a:lnT w="12700" cap="flat" cmpd="sng" algn="ctr">
+                      <a:solidFill>
+                        <a:schemeClr val="bg1"/>
+                      </a:solidFill>
+                      <a:prstDash val="solid"/>
+                      <a:round/>
+                      <a:headEnd type="none" w="med" len="med"/>
+                      <a:tailEnd type="none" w="med" len="med"/>
+                    </a:lnT>
+                    <a:lnB w="12700" cap="flat" cmpd="sng" algn="ctr">
+                      <a:solidFill>
+                        <a:schemeClr val="bg1"/>
+                      </a:solidFill>
+                      <a:prstDash val="solid"/>
+                      <a:round/>
+                      <a:headEnd type="none" w="med" len="med"/>
+                      <a:tailEnd type="none" w="med" len="med"/>
+                    </a:lnB>
+                  </a:tcPr>
+                </a:tc>
+                <a:tc>
+                  <a:txBody>
+                    <a:bodyPr/>
+                    <a:lstStyle/>
+                    <a:p>
+                      <a:r>
+                        <a:rPr lang="en-US" sz="1200" b="1"/>
+                        <a:t>pack(padx=20)</a:t>
+                      </a:r>
+                    </a:p>
+                  </a:txBody>
+                  <a:tcPr marL="50189" marR="50189" marT="25095" marB="25095" anchor="ctr">
+                    <a:lnL w="12700" cap="flat" cmpd="sng" algn="ctr">
+                      <a:solidFill>
+                        <a:schemeClr val="bg1"/>
+                      </a:solidFill>
+                      <a:prstDash val="solid"/>
+                      <a:round/>
+                      <a:headEnd type="none" w="med" len="med"/>
+                      <a:tailEnd type="none" w="med" len="med"/>
+                    </a:lnL>
+                    <a:lnR w="12700" cap="flat" cmpd="sng" algn="ctr">
+                      <a:solidFill>
+                        <a:schemeClr val="bg1"/>
+                      </a:solidFill>
+                      <a:prstDash val="solid"/>
+                      <a:round/>
+                      <a:headEnd type="none" w="med" len="med"/>
+                      <a:tailEnd type="none" w="med" len="med"/>
+                    </a:lnR>
+                    <a:lnT w="12700" cap="flat" cmpd="sng" algn="ctr">
+                      <a:solidFill>
+                        <a:schemeClr val="bg1"/>
+                      </a:solidFill>
+                      <a:prstDash val="solid"/>
+                      <a:round/>
+                      <a:headEnd type="none" w="med" len="med"/>
+                      <a:tailEnd type="none" w="med" len="med"/>
+                    </a:lnT>
+                    <a:lnB w="12700" cap="flat" cmpd="sng" algn="ctr">
+                      <a:solidFill>
+                        <a:schemeClr val="bg1"/>
+                      </a:solidFill>
+                      <a:prstDash val="solid"/>
+                      <a:round/>
+                      <a:headEnd type="none" w="med" len="med"/>
+                      <a:tailEnd type="none" w="med" len="med"/>
+                    </a:lnB>
+                  </a:tcPr>
+                </a:tc>
+                <a:extLst>
+                  <a:ext uri="{0D108BD9-81ED-4DB2-BD59-A6C34878D82A}">
+                    <a16:rowId xmlns:a16="http://schemas.microsoft.com/office/drawing/2014/main" val="2125264313"/>
+                  </a:ext>
+                </a:extLst>
+              </a:tr>
+              <a:tr h="295500">
+                <a:tc>
+                  <a:txBody>
+                    <a:bodyPr/>
+                    <a:lstStyle/>
+                    <a:p>
+                      <a:r>
+                        <a:rPr lang="en-US" sz="1200" b="1"/>
+                        <a:t>pady</a:t>
+                      </a:r>
+                    </a:p>
+                  </a:txBody>
+                  <a:tcPr marL="50189" marR="50189" marT="25095" marB="25095" anchor="ctr">
+                    <a:lnL w="12700" cap="flat" cmpd="sng" algn="ctr">
+                      <a:solidFill>
+                        <a:schemeClr val="bg1"/>
+                      </a:solidFill>
+                      <a:prstDash val="solid"/>
+                      <a:round/>
+                      <a:headEnd type="none" w="med" len="med"/>
+                      <a:tailEnd type="none" w="med" len="med"/>
+                    </a:lnL>
+                    <a:lnR w="12700" cap="flat" cmpd="sng" algn="ctr">
+                      <a:solidFill>
+                        <a:schemeClr val="bg1"/>
+                      </a:solidFill>
+                      <a:prstDash val="solid"/>
+                      <a:round/>
+                      <a:headEnd type="none" w="med" len="med"/>
+                      <a:tailEnd type="none" w="med" len="med"/>
+                    </a:lnR>
+                    <a:lnT w="12700" cap="flat" cmpd="sng" algn="ctr">
+                      <a:solidFill>
+                        <a:schemeClr val="bg1"/>
+                      </a:solidFill>
+                      <a:prstDash val="solid"/>
+                      <a:round/>
+                      <a:headEnd type="none" w="med" len="med"/>
+                      <a:tailEnd type="none" w="med" len="med"/>
+                    </a:lnT>
+                    <a:lnB w="12700" cap="flat" cmpd="sng" algn="ctr">
+                      <a:solidFill>
+                        <a:schemeClr val="bg1"/>
+                      </a:solidFill>
+                      <a:prstDash val="solid"/>
+                      <a:round/>
+                      <a:headEnd type="none" w="med" len="med"/>
+                      <a:tailEnd type="none" w="med" len="med"/>
+                    </a:lnB>
+                  </a:tcPr>
+                </a:tc>
+                <a:tc>
+                  <a:txBody>
+                    <a:bodyPr/>
+                    <a:lstStyle/>
+                    <a:p>
+                      <a:r>
+                        <a:rPr lang="en-US" sz="1200" b="1"/>
+                        <a:t>Integer (0, 10, 20, ...)</a:t>
+                      </a:r>
+                    </a:p>
+                  </a:txBody>
+                  <a:tcPr marL="50189" marR="50189" marT="25095" marB="25095" anchor="ctr">
+                    <a:lnL w="12700" cap="flat" cmpd="sng" algn="ctr">
+                      <a:solidFill>
+                        <a:schemeClr val="bg1"/>
+                      </a:solidFill>
+                      <a:prstDash val="solid"/>
+                      <a:round/>
+                      <a:headEnd type="none" w="med" len="med"/>
+                      <a:tailEnd type="none" w="med" len="med"/>
+                    </a:lnL>
+                    <a:lnR w="12700" cap="flat" cmpd="sng" algn="ctr">
+                      <a:solidFill>
+                        <a:schemeClr val="bg1"/>
+                      </a:solidFill>
+                      <a:prstDash val="solid"/>
+                      <a:round/>
+                      <a:headEnd type="none" w="med" len="med"/>
+                      <a:tailEnd type="none" w="med" len="med"/>
+                    </a:lnR>
+                    <a:lnT w="12700" cap="flat" cmpd="sng" algn="ctr">
+                      <a:solidFill>
+                        <a:schemeClr val="bg1"/>
+                      </a:solidFill>
+                      <a:prstDash val="solid"/>
+                      <a:round/>
+                      <a:headEnd type="none" w="med" len="med"/>
+                      <a:tailEnd type="none" w="med" len="med"/>
+                    </a:lnT>
+                    <a:lnB w="12700" cap="flat" cmpd="sng" algn="ctr">
+                      <a:solidFill>
+                        <a:schemeClr val="bg1"/>
+                      </a:solidFill>
+                      <a:prstDash val="solid"/>
+                      <a:round/>
+                      <a:headEnd type="none" w="med" len="med"/>
+                      <a:tailEnd type="none" w="med" len="med"/>
+                    </a:lnB>
+                  </a:tcPr>
+                </a:tc>
+                <a:tc>
+                  <a:txBody>
+                    <a:bodyPr/>
+                    <a:lstStyle/>
+                    <a:p>
+                      <a:r>
+                        <a:rPr lang="en-US" sz="1200" b="1"/>
+                        <a:t>Adds vertical space outside the widget.</a:t>
+                      </a:r>
+                    </a:p>
+                  </a:txBody>
+                  <a:tcPr marL="50189" marR="50189" marT="25095" marB="25095" anchor="ctr">
+                    <a:lnL w="12700" cap="flat" cmpd="sng" algn="ctr">
+                      <a:solidFill>
+                        <a:schemeClr val="bg1"/>
+                      </a:solidFill>
+                      <a:prstDash val="solid"/>
+                      <a:round/>
+                      <a:headEnd type="none" w="med" len="med"/>
+                      <a:tailEnd type="none" w="med" len="med"/>
+                    </a:lnL>
+                    <a:lnR w="12700" cap="flat" cmpd="sng" algn="ctr">
+                      <a:solidFill>
+                        <a:schemeClr val="bg1"/>
+                      </a:solidFill>
+                      <a:prstDash val="solid"/>
+                      <a:round/>
+                      <a:headEnd type="none" w="med" len="med"/>
+                      <a:tailEnd type="none" w="med" len="med"/>
+                    </a:lnR>
+                    <a:lnT w="12700" cap="flat" cmpd="sng" algn="ctr">
+                      <a:solidFill>
+                        <a:schemeClr val="bg1"/>
+                      </a:solidFill>
+                      <a:prstDash val="solid"/>
+                      <a:round/>
+                      <a:headEnd type="none" w="med" len="med"/>
+                      <a:tailEnd type="none" w="med" len="med"/>
+                    </a:lnT>
+                    <a:lnB w="12700" cap="flat" cmpd="sng" algn="ctr">
+                      <a:solidFill>
+                        <a:schemeClr val="bg1"/>
+                      </a:solidFill>
+                      <a:prstDash val="solid"/>
+                      <a:round/>
+                      <a:headEnd type="none" w="med" len="med"/>
+                      <a:tailEnd type="none" w="med" len="med"/>
+                    </a:lnB>
+                  </a:tcPr>
+                </a:tc>
+                <a:tc>
+                  <a:txBody>
+                    <a:bodyPr/>
+                    <a:lstStyle/>
+                    <a:p>
+                      <a:r>
+                        <a:rPr lang="en-US" sz="1200" b="1"/>
+                        <a:t>pack(pady=15)</a:t>
+                      </a:r>
+                    </a:p>
+                  </a:txBody>
+                  <a:tcPr marL="50189" marR="50189" marT="25095" marB="25095" anchor="ctr">
+                    <a:lnL w="12700" cap="flat" cmpd="sng" algn="ctr">
+                      <a:solidFill>
+                        <a:schemeClr val="bg1"/>
+                      </a:solidFill>
+                      <a:prstDash val="solid"/>
+                      <a:round/>
+                      <a:headEnd type="none" w="med" len="med"/>
+                      <a:tailEnd type="none" w="med" len="med"/>
+                    </a:lnL>
+                    <a:lnR w="12700" cap="flat" cmpd="sng" algn="ctr">
+                      <a:solidFill>
+                        <a:schemeClr val="bg1"/>
+                      </a:solidFill>
+                      <a:prstDash val="solid"/>
+                      <a:round/>
+                      <a:headEnd type="none" w="med" len="med"/>
+                      <a:tailEnd type="none" w="med" len="med"/>
+                    </a:lnR>
+                    <a:lnT w="12700" cap="flat" cmpd="sng" algn="ctr">
+                      <a:solidFill>
+                        <a:schemeClr val="bg1"/>
+                      </a:solidFill>
+                      <a:prstDash val="solid"/>
+                      <a:round/>
+                      <a:headEnd type="none" w="med" len="med"/>
+                      <a:tailEnd type="none" w="med" len="med"/>
+                    </a:lnT>
+                    <a:lnB w="12700" cap="flat" cmpd="sng" algn="ctr">
+                      <a:solidFill>
+                        <a:schemeClr val="bg1"/>
+                      </a:solidFill>
+                      <a:prstDash val="solid"/>
+                      <a:round/>
+                      <a:headEnd type="none" w="med" len="med"/>
+                      <a:tailEnd type="none" w="med" len="med"/>
+                    </a:lnB>
+                  </a:tcPr>
+                </a:tc>
+                <a:extLst>
+                  <a:ext uri="{0D108BD9-81ED-4DB2-BD59-A6C34878D82A}">
+                    <a16:rowId xmlns:a16="http://schemas.microsoft.com/office/drawing/2014/main" val="3351685061"/>
+                  </a:ext>
+                </a:extLst>
+              </a:tr>
+              <a:tr h="295500">
+                <a:tc>
+                  <a:txBody>
+                    <a:bodyPr/>
+                    <a:lstStyle/>
+                    <a:p>
+                      <a:r>
+                        <a:rPr lang="en-US" sz="1200" b="1"/>
+                        <a:t>ipadx</a:t>
+                      </a:r>
+                    </a:p>
+                  </a:txBody>
+                  <a:tcPr marL="50189" marR="50189" marT="25095" marB="25095" anchor="ctr">
+                    <a:lnL w="12700" cap="flat" cmpd="sng" algn="ctr">
+                      <a:solidFill>
+                        <a:schemeClr val="bg1"/>
+                      </a:solidFill>
+                      <a:prstDash val="solid"/>
+                      <a:round/>
+                      <a:headEnd type="none" w="med" len="med"/>
+                      <a:tailEnd type="none" w="med" len="med"/>
+                    </a:lnL>
+                    <a:lnR w="12700" cap="flat" cmpd="sng" algn="ctr">
+                      <a:solidFill>
+                        <a:schemeClr val="bg1"/>
+                      </a:solidFill>
+                      <a:prstDash val="solid"/>
+                      <a:round/>
+                      <a:headEnd type="none" w="med" len="med"/>
+                      <a:tailEnd type="none" w="med" len="med"/>
+                    </a:lnR>
+                    <a:lnT w="12700" cap="flat" cmpd="sng" algn="ctr">
+                      <a:solidFill>
+                        <a:schemeClr val="bg1"/>
+                      </a:solidFill>
+                      <a:prstDash val="solid"/>
+                      <a:round/>
+                      <a:headEnd type="none" w="med" len="med"/>
+                      <a:tailEnd type="none" w="med" len="med"/>
+                    </a:lnT>
+                    <a:lnB w="12700" cap="flat" cmpd="sng" algn="ctr">
+                      <a:solidFill>
+                        <a:schemeClr val="bg1"/>
+                      </a:solidFill>
+                      <a:prstDash val="solid"/>
+                      <a:round/>
+                      <a:headEnd type="none" w="med" len="med"/>
+                      <a:tailEnd type="none" w="med" len="med"/>
+                    </a:lnB>
+                  </a:tcPr>
+                </a:tc>
+                <a:tc>
+                  <a:txBody>
+                    <a:bodyPr/>
+                    <a:lstStyle/>
+                    <a:p>
+                      <a:r>
+                        <a:rPr lang="en-US" sz="1200" b="1"/>
+                        <a:t>Integer (0, 10, 20, ...)</a:t>
+                      </a:r>
+                    </a:p>
+                  </a:txBody>
+                  <a:tcPr marL="50189" marR="50189" marT="25095" marB="25095" anchor="ctr">
+                    <a:lnL w="12700" cap="flat" cmpd="sng" algn="ctr">
+                      <a:solidFill>
+                        <a:schemeClr val="bg1"/>
+                      </a:solidFill>
+                      <a:prstDash val="solid"/>
+                      <a:round/>
+                      <a:headEnd type="none" w="med" len="med"/>
+                      <a:tailEnd type="none" w="med" len="med"/>
+                    </a:lnL>
+                    <a:lnR w="12700" cap="flat" cmpd="sng" algn="ctr">
+                      <a:solidFill>
+                        <a:schemeClr val="bg1"/>
+                      </a:solidFill>
+                      <a:prstDash val="solid"/>
+                      <a:round/>
+                      <a:headEnd type="none" w="med" len="med"/>
+                      <a:tailEnd type="none" w="med" len="med"/>
+                    </a:lnR>
+                    <a:lnT w="12700" cap="flat" cmpd="sng" algn="ctr">
+                      <a:solidFill>
+                        <a:schemeClr val="bg1"/>
+                      </a:solidFill>
+                      <a:prstDash val="solid"/>
+                      <a:round/>
+                      <a:headEnd type="none" w="med" len="med"/>
+                      <a:tailEnd type="none" w="med" len="med"/>
+                    </a:lnT>
+                    <a:lnB w="12700" cap="flat" cmpd="sng" algn="ctr">
+                      <a:solidFill>
+                        <a:schemeClr val="bg1"/>
+                      </a:solidFill>
+                      <a:prstDash val="solid"/>
+                      <a:round/>
+                      <a:headEnd type="none" w="med" len="med"/>
+                      <a:tailEnd type="none" w="med" len="med"/>
+                    </a:lnB>
+                  </a:tcPr>
+                </a:tc>
+                <a:tc>
+                  <a:txBody>
+                    <a:bodyPr/>
+                    <a:lstStyle/>
+                    <a:p>
+                      <a:r>
+                        <a:rPr lang="en-US" sz="1200" b="1"/>
+                        <a:t>Adds horizontal space inside the widget.</a:t>
+                      </a:r>
+                    </a:p>
+                  </a:txBody>
+                  <a:tcPr marL="50189" marR="50189" marT="25095" marB="25095" anchor="ctr">
+                    <a:lnL w="12700" cap="flat" cmpd="sng" algn="ctr">
+                      <a:solidFill>
+                        <a:schemeClr val="bg1"/>
+                      </a:solidFill>
+                      <a:prstDash val="solid"/>
+                      <a:round/>
+                      <a:headEnd type="none" w="med" len="med"/>
+                      <a:tailEnd type="none" w="med" len="med"/>
+                    </a:lnL>
+                    <a:lnR w="12700" cap="flat" cmpd="sng" algn="ctr">
+                      <a:solidFill>
+                        <a:schemeClr val="bg1"/>
+                      </a:solidFill>
+                      <a:prstDash val="solid"/>
+                      <a:round/>
+                      <a:headEnd type="none" w="med" len="med"/>
+                      <a:tailEnd type="none" w="med" len="med"/>
+                    </a:lnR>
+                    <a:lnT w="12700" cap="flat" cmpd="sng" algn="ctr">
+                      <a:solidFill>
+                        <a:schemeClr val="bg1"/>
+                      </a:solidFill>
+                      <a:prstDash val="solid"/>
+                      <a:round/>
+                      <a:headEnd type="none" w="med" len="med"/>
+                      <a:tailEnd type="none" w="med" len="med"/>
+                    </a:lnT>
+                    <a:lnB w="12700" cap="flat" cmpd="sng" algn="ctr">
+                      <a:solidFill>
+                        <a:schemeClr val="bg1"/>
+                      </a:solidFill>
+                      <a:prstDash val="solid"/>
+                      <a:round/>
+                      <a:headEnd type="none" w="med" len="med"/>
+                      <a:tailEnd type="none" w="med" len="med"/>
+                    </a:lnB>
+                  </a:tcPr>
+                </a:tc>
+                <a:tc>
+                  <a:txBody>
+                    <a:bodyPr/>
+                    <a:lstStyle/>
+                    <a:p>
+                      <a:r>
+                        <a:rPr lang="en-US" sz="1200" b="1"/>
+                        <a:t>pack(ipadx=10)</a:t>
+                      </a:r>
+                    </a:p>
+                  </a:txBody>
+                  <a:tcPr marL="50189" marR="50189" marT="25095" marB="25095" anchor="ctr">
+                    <a:lnL w="12700" cap="flat" cmpd="sng" algn="ctr">
+                      <a:solidFill>
+                        <a:schemeClr val="bg1"/>
+                      </a:solidFill>
+                      <a:prstDash val="solid"/>
+                      <a:round/>
+                      <a:headEnd type="none" w="med" len="med"/>
+                      <a:tailEnd type="none" w="med" len="med"/>
+                    </a:lnL>
+                    <a:lnR w="12700" cap="flat" cmpd="sng" algn="ctr">
+                      <a:solidFill>
+                        <a:schemeClr val="bg1"/>
+                      </a:solidFill>
+                      <a:prstDash val="solid"/>
+                      <a:round/>
+                      <a:headEnd type="none" w="med" len="med"/>
+                      <a:tailEnd type="none" w="med" len="med"/>
+                    </a:lnR>
+                    <a:lnT w="12700" cap="flat" cmpd="sng" algn="ctr">
+                      <a:solidFill>
+                        <a:schemeClr val="bg1"/>
+                      </a:solidFill>
+                      <a:prstDash val="solid"/>
+                      <a:round/>
+                      <a:headEnd type="none" w="med" len="med"/>
+                      <a:tailEnd type="none" w="med" len="med"/>
+                    </a:lnT>
+                    <a:lnB w="12700" cap="flat" cmpd="sng" algn="ctr">
+                      <a:solidFill>
+                        <a:schemeClr val="bg1"/>
+                      </a:solidFill>
+                      <a:prstDash val="solid"/>
+                      <a:round/>
+                      <a:headEnd type="none" w="med" len="med"/>
+                      <a:tailEnd type="none" w="med" len="med"/>
+                    </a:lnB>
+                  </a:tcPr>
+                </a:tc>
+                <a:extLst>
+                  <a:ext uri="{0D108BD9-81ED-4DB2-BD59-A6C34878D82A}">
+                    <a16:rowId xmlns:a16="http://schemas.microsoft.com/office/drawing/2014/main" val="2749903895"/>
+                  </a:ext>
+                </a:extLst>
+              </a:tr>
+              <a:tr h="295500">
+                <a:tc>
+                  <a:txBody>
+                    <a:bodyPr/>
+                    <a:lstStyle/>
+                    <a:p>
+                      <a:r>
+                        <a:rPr lang="en-US" sz="1200" b="1"/>
+                        <a:t>ipady</a:t>
+                      </a:r>
+                    </a:p>
+                  </a:txBody>
+                  <a:tcPr marL="50189" marR="50189" marT="25095" marB="25095" anchor="ctr">
+                    <a:lnL w="12700" cap="flat" cmpd="sng" algn="ctr">
+                      <a:solidFill>
+                        <a:schemeClr val="bg1"/>
+                      </a:solidFill>
+                      <a:prstDash val="solid"/>
+                      <a:round/>
+                      <a:headEnd type="none" w="med" len="med"/>
+                      <a:tailEnd type="none" w="med" len="med"/>
+                    </a:lnL>
+                    <a:lnR w="12700" cap="flat" cmpd="sng" algn="ctr">
+                      <a:solidFill>
+                        <a:schemeClr val="bg1"/>
+                      </a:solidFill>
+                      <a:prstDash val="solid"/>
+                      <a:round/>
+                      <a:headEnd type="none" w="med" len="med"/>
+                      <a:tailEnd type="none" w="med" len="med"/>
+                    </a:lnR>
+                    <a:lnT w="12700" cap="flat" cmpd="sng" algn="ctr">
+                      <a:solidFill>
+                        <a:schemeClr val="bg1"/>
+                      </a:solidFill>
+                      <a:prstDash val="solid"/>
+                      <a:round/>
+                      <a:headEnd type="none" w="med" len="med"/>
+                      <a:tailEnd type="none" w="med" len="med"/>
+                    </a:lnT>
+                    <a:lnB w="12700" cap="flat" cmpd="sng" algn="ctr">
+                      <a:solidFill>
+                        <a:schemeClr val="bg1"/>
+                      </a:solidFill>
+                      <a:prstDash val="solid"/>
+                      <a:round/>
+                      <a:headEnd type="none" w="med" len="med"/>
+                      <a:tailEnd type="none" w="med" len="med"/>
+                    </a:lnB>
+                  </a:tcPr>
+                </a:tc>
+                <a:tc>
+                  <a:txBody>
+                    <a:bodyPr/>
+                    <a:lstStyle/>
+                    <a:p>
+                      <a:r>
+                        <a:rPr lang="en-US" sz="1200" b="1"/>
+                        <a:t>Integer (0, 10, 20, ...)</a:t>
+                      </a:r>
+                    </a:p>
+                  </a:txBody>
+                  <a:tcPr marL="50189" marR="50189" marT="25095" marB="25095" anchor="ctr">
+                    <a:lnL w="12700" cap="flat" cmpd="sng" algn="ctr">
+                      <a:solidFill>
+                        <a:schemeClr val="bg1"/>
+                      </a:solidFill>
+                      <a:prstDash val="solid"/>
+                      <a:round/>
+                      <a:headEnd type="none" w="med" len="med"/>
+                      <a:tailEnd type="none" w="med" len="med"/>
+                    </a:lnL>
+                    <a:lnR w="12700" cap="flat" cmpd="sng" algn="ctr">
+                      <a:solidFill>
+                        <a:schemeClr val="bg1"/>
+                      </a:solidFill>
+                      <a:prstDash val="solid"/>
+                      <a:round/>
+                      <a:headEnd type="none" w="med" len="med"/>
+                      <a:tailEnd type="none" w="med" len="med"/>
+                    </a:lnR>
+                    <a:lnT w="12700" cap="flat" cmpd="sng" algn="ctr">
+                      <a:solidFill>
+                        <a:schemeClr val="bg1"/>
+                      </a:solidFill>
+                      <a:prstDash val="solid"/>
+                      <a:round/>
+                      <a:headEnd type="none" w="med" len="med"/>
+                      <a:tailEnd type="none" w="med" len="med"/>
+                    </a:lnT>
+                    <a:lnB w="12700" cap="flat" cmpd="sng" algn="ctr">
+                      <a:solidFill>
+                        <a:schemeClr val="bg1"/>
+                      </a:solidFill>
+                      <a:prstDash val="solid"/>
+                      <a:round/>
+                      <a:headEnd type="none" w="med" len="med"/>
+                      <a:tailEnd type="none" w="med" len="med"/>
+                    </a:lnB>
+                  </a:tcPr>
+                </a:tc>
+                <a:tc>
+                  <a:txBody>
+                    <a:bodyPr/>
+                    <a:lstStyle/>
+                    <a:p>
+                      <a:r>
+                        <a:rPr lang="en-US" sz="1200" b="1"/>
+                        <a:t>Adds vertical space inside the widget.</a:t>
+                      </a:r>
+                    </a:p>
+                  </a:txBody>
+                  <a:tcPr marL="50189" marR="50189" marT="25095" marB="25095" anchor="ctr">
+                    <a:lnL w="12700" cap="flat" cmpd="sng" algn="ctr">
+                      <a:solidFill>
+                        <a:schemeClr val="bg1"/>
+                      </a:solidFill>
+                      <a:prstDash val="solid"/>
+                      <a:round/>
+                      <a:headEnd type="none" w="med" len="med"/>
+                      <a:tailEnd type="none" w="med" len="med"/>
+                    </a:lnL>
+                    <a:lnR w="12700" cap="flat" cmpd="sng" algn="ctr">
+                      <a:solidFill>
+                        <a:schemeClr val="bg1"/>
+                      </a:solidFill>
+                      <a:prstDash val="solid"/>
+                      <a:round/>
+                      <a:headEnd type="none" w="med" len="med"/>
+                      <a:tailEnd type="none" w="med" len="med"/>
+                    </a:lnR>
+                    <a:lnT w="12700" cap="flat" cmpd="sng" algn="ctr">
+                      <a:solidFill>
+                        <a:schemeClr val="bg1"/>
+                      </a:solidFill>
+                      <a:prstDash val="solid"/>
+                      <a:round/>
+                      <a:headEnd type="none" w="med" len="med"/>
+                      <a:tailEnd type="none" w="med" len="med"/>
+                    </a:lnT>
+                    <a:lnB w="12700" cap="flat" cmpd="sng" algn="ctr">
+                      <a:solidFill>
+                        <a:schemeClr val="bg1"/>
+                      </a:solidFill>
+                      <a:prstDash val="solid"/>
+                      <a:round/>
+                      <a:headEnd type="none" w="med" len="med"/>
+                      <a:tailEnd type="none" w="med" len="med"/>
+                    </a:lnB>
+                  </a:tcPr>
+                </a:tc>
+                <a:tc>
+                  <a:txBody>
+                    <a:bodyPr/>
+                    <a:lstStyle/>
+                    <a:p>
+                      <a:r>
+                        <a:rPr lang="en-US" sz="1200" b="1"/>
+                        <a:t>pack(ipady=10)</a:t>
+                      </a:r>
+                    </a:p>
+                  </a:txBody>
+                  <a:tcPr marL="50189" marR="50189" marT="25095" marB="25095" anchor="ctr">
+                    <a:lnL w="12700" cap="flat" cmpd="sng" algn="ctr">
+                      <a:solidFill>
+                        <a:schemeClr val="bg1"/>
+                      </a:solidFill>
+                      <a:prstDash val="solid"/>
+                      <a:round/>
+                      <a:headEnd type="none" w="med" len="med"/>
+                      <a:tailEnd type="none" w="med" len="med"/>
+                    </a:lnL>
+                    <a:lnR w="12700" cap="flat" cmpd="sng" algn="ctr">
+                      <a:solidFill>
+                        <a:schemeClr val="bg1"/>
+                      </a:solidFill>
+                      <a:prstDash val="solid"/>
+                      <a:round/>
+                      <a:headEnd type="none" w="med" len="med"/>
+                      <a:tailEnd type="none" w="med" len="med"/>
+                    </a:lnR>
+                    <a:lnT w="12700" cap="flat" cmpd="sng" algn="ctr">
+                      <a:solidFill>
+                        <a:schemeClr val="bg1"/>
+                      </a:solidFill>
+                      <a:prstDash val="solid"/>
+                      <a:round/>
+                      <a:headEnd type="none" w="med" len="med"/>
+                      <a:tailEnd type="none" w="med" len="med"/>
+                    </a:lnT>
+                    <a:lnB w="12700" cap="flat" cmpd="sng" algn="ctr">
+                      <a:solidFill>
+                        <a:schemeClr val="bg1"/>
+                      </a:solidFill>
+                      <a:prstDash val="solid"/>
+                      <a:round/>
+                      <a:headEnd type="none" w="med" len="med"/>
+                      <a:tailEnd type="none" w="med" len="med"/>
+                    </a:lnB>
+                  </a:tcPr>
+                </a:tc>
+                <a:extLst>
+                  <a:ext uri="{0D108BD9-81ED-4DB2-BD59-A6C34878D82A}">
+                    <a16:rowId xmlns:a16="http://schemas.microsoft.com/office/drawing/2014/main" val="2680934909"/>
+                  </a:ext>
+                </a:extLst>
+              </a:tr>
+              <a:tr h="445271">
+                <a:tc>
+                  <a:txBody>
+                    <a:bodyPr/>
+                    <a:lstStyle/>
+                    <a:p>
+                      <a:r>
+                        <a:rPr lang="en-US" sz="1200" b="1"/>
+                        <a:t>before</a:t>
+                      </a:r>
+                    </a:p>
+                  </a:txBody>
+                  <a:tcPr marL="50189" marR="50189" marT="25095" marB="25095" anchor="ctr">
+                    <a:lnL w="12700" cap="flat" cmpd="sng" algn="ctr">
+                      <a:solidFill>
+                        <a:schemeClr val="bg1"/>
+                      </a:solidFill>
+                      <a:prstDash val="solid"/>
+                      <a:round/>
+                      <a:headEnd type="none" w="med" len="med"/>
+                      <a:tailEnd type="none" w="med" len="med"/>
+                    </a:lnL>
+                    <a:lnR w="12700" cap="flat" cmpd="sng" algn="ctr">
+                      <a:solidFill>
+                        <a:schemeClr val="bg1"/>
+                      </a:solidFill>
+                      <a:prstDash val="solid"/>
+                      <a:round/>
+                      <a:headEnd type="none" w="med" len="med"/>
+                      <a:tailEnd type="none" w="med" len="med"/>
+                    </a:lnR>
+                    <a:lnT w="12700" cap="flat" cmpd="sng" algn="ctr">
+                      <a:solidFill>
+                        <a:schemeClr val="bg1"/>
+                      </a:solidFill>
+                      <a:prstDash val="solid"/>
+                      <a:round/>
+                      <a:headEnd type="none" w="med" len="med"/>
+                      <a:tailEnd type="none" w="med" len="med"/>
+                    </a:lnT>
+                    <a:lnB w="12700" cap="flat" cmpd="sng" algn="ctr">
+                      <a:solidFill>
+                        <a:schemeClr val="bg1"/>
+                      </a:solidFill>
+                      <a:prstDash val="solid"/>
+                      <a:round/>
+                      <a:headEnd type="none" w="med" len="med"/>
+                      <a:tailEnd type="none" w="med" len="med"/>
+                    </a:lnB>
+                  </a:tcPr>
+                </a:tc>
+                <a:tc>
+                  <a:txBody>
+                    <a:bodyPr/>
+                    <a:lstStyle/>
+                    <a:p>
+                      <a:r>
+                        <a:rPr lang="en-US" sz="1200" b="1"/>
+                        <a:t>Another widget</a:t>
+                      </a:r>
+                    </a:p>
+                  </a:txBody>
+                  <a:tcPr marL="50189" marR="50189" marT="25095" marB="25095" anchor="ctr">
+                    <a:lnL w="12700" cap="flat" cmpd="sng" algn="ctr">
+                      <a:solidFill>
+                        <a:schemeClr val="bg1"/>
+                      </a:solidFill>
+                      <a:prstDash val="solid"/>
+                      <a:round/>
+                      <a:headEnd type="none" w="med" len="med"/>
+                      <a:tailEnd type="none" w="med" len="med"/>
+                    </a:lnL>
+                    <a:lnR w="12700" cap="flat" cmpd="sng" algn="ctr">
+                      <a:solidFill>
+                        <a:schemeClr val="bg1"/>
+                      </a:solidFill>
+                      <a:prstDash val="solid"/>
+                      <a:round/>
+                      <a:headEnd type="none" w="med" len="med"/>
+                      <a:tailEnd type="none" w="med" len="med"/>
+                    </a:lnR>
+                    <a:lnT w="12700" cap="flat" cmpd="sng" algn="ctr">
+                      <a:solidFill>
+                        <a:schemeClr val="bg1"/>
+                      </a:solidFill>
+                      <a:prstDash val="solid"/>
+                      <a:round/>
+                      <a:headEnd type="none" w="med" len="med"/>
+                      <a:tailEnd type="none" w="med" len="med"/>
+                    </a:lnT>
+                    <a:lnB w="12700" cap="flat" cmpd="sng" algn="ctr">
+                      <a:solidFill>
+                        <a:schemeClr val="bg1"/>
+                      </a:solidFill>
+                      <a:prstDash val="solid"/>
+                      <a:round/>
+                      <a:headEnd type="none" w="med" len="med"/>
+                      <a:tailEnd type="none" w="med" len="med"/>
+                    </a:lnB>
+                  </a:tcPr>
+                </a:tc>
+                <a:tc>
+                  <a:txBody>
+                    <a:bodyPr/>
+                    <a:lstStyle/>
+                    <a:p>
+                      <a:r>
+                        <a:rPr lang="en-US" sz="1200" b="1"/>
+                        <a:t>Places the widget before another packed widget.</a:t>
+                      </a:r>
+                    </a:p>
+                  </a:txBody>
+                  <a:tcPr marL="50189" marR="50189" marT="25095" marB="25095" anchor="ctr">
+                    <a:lnL w="12700" cap="flat" cmpd="sng" algn="ctr">
+                      <a:solidFill>
+                        <a:schemeClr val="bg1"/>
+                      </a:solidFill>
+                      <a:prstDash val="solid"/>
+                      <a:round/>
+                      <a:headEnd type="none" w="med" len="med"/>
+                      <a:tailEnd type="none" w="med" len="med"/>
+                    </a:lnL>
+                    <a:lnR w="12700" cap="flat" cmpd="sng" algn="ctr">
+                      <a:solidFill>
+                        <a:schemeClr val="bg1"/>
+                      </a:solidFill>
+                      <a:prstDash val="solid"/>
+                      <a:round/>
+                      <a:headEnd type="none" w="med" len="med"/>
+                      <a:tailEnd type="none" w="med" len="med"/>
+                    </a:lnR>
+                    <a:lnT w="12700" cap="flat" cmpd="sng" algn="ctr">
+                      <a:solidFill>
+                        <a:schemeClr val="bg1"/>
+                      </a:solidFill>
+                      <a:prstDash val="solid"/>
+                      <a:round/>
+                      <a:headEnd type="none" w="med" len="med"/>
+                      <a:tailEnd type="none" w="med" len="med"/>
+                    </a:lnT>
+                    <a:lnB w="12700" cap="flat" cmpd="sng" algn="ctr">
+                      <a:solidFill>
+                        <a:schemeClr val="bg1"/>
+                      </a:solidFill>
+                      <a:prstDash val="solid"/>
+                      <a:round/>
+                      <a:headEnd type="none" w="med" len="med"/>
+                      <a:tailEnd type="none" w="med" len="med"/>
+                    </a:lnB>
+                  </a:tcPr>
+                </a:tc>
+                <a:tc>
+                  <a:txBody>
+                    <a:bodyPr/>
+                    <a:lstStyle/>
+                    <a:p>
+                      <a:r>
+                        <a:rPr lang="en-US" sz="1200" b="1"/>
+                        <a:t>pack(before=label2)</a:t>
+                      </a:r>
+                    </a:p>
+                  </a:txBody>
+                  <a:tcPr marL="50189" marR="50189" marT="25095" marB="25095" anchor="ctr">
+                    <a:lnL w="12700" cap="flat" cmpd="sng" algn="ctr">
+                      <a:solidFill>
+                        <a:schemeClr val="bg1"/>
+                      </a:solidFill>
+                      <a:prstDash val="solid"/>
+                      <a:round/>
+                      <a:headEnd type="none" w="med" len="med"/>
+                      <a:tailEnd type="none" w="med" len="med"/>
+                    </a:lnL>
+                    <a:lnR w="12700" cap="flat" cmpd="sng" algn="ctr">
+                      <a:solidFill>
+                        <a:schemeClr val="bg1"/>
+                      </a:solidFill>
+                      <a:prstDash val="solid"/>
+                      <a:round/>
+                      <a:headEnd type="none" w="med" len="med"/>
+                      <a:tailEnd type="none" w="med" len="med"/>
+                    </a:lnR>
+                    <a:lnT w="12700" cap="flat" cmpd="sng" algn="ctr">
+                      <a:solidFill>
+                        <a:schemeClr val="bg1"/>
+                      </a:solidFill>
+                      <a:prstDash val="solid"/>
+                      <a:round/>
+                      <a:headEnd type="none" w="med" len="med"/>
+                      <a:tailEnd type="none" w="med" len="med"/>
+                    </a:lnT>
+                    <a:lnB w="12700" cap="flat" cmpd="sng" algn="ctr">
+                      <a:solidFill>
+                        <a:schemeClr val="bg1"/>
+                      </a:solidFill>
+                      <a:prstDash val="solid"/>
+                      <a:round/>
+                      <a:headEnd type="none" w="med" len="med"/>
+                      <a:tailEnd type="none" w="med" len="med"/>
+                    </a:lnB>
+                  </a:tcPr>
+                </a:tc>
+                <a:extLst>
+                  <a:ext uri="{0D108BD9-81ED-4DB2-BD59-A6C34878D82A}">
+                    <a16:rowId xmlns:a16="http://schemas.microsoft.com/office/drawing/2014/main" val="4276210454"/>
+                  </a:ext>
+                </a:extLst>
+              </a:tr>
+              <a:tr h="445271">
+                <a:tc>
+                  <a:txBody>
+                    <a:bodyPr/>
+                    <a:lstStyle/>
+                    <a:p>
+                      <a:r>
+                        <a:rPr lang="en-US" sz="1200" b="1"/>
+                        <a:t>after</a:t>
+                      </a:r>
+                    </a:p>
+                  </a:txBody>
+                  <a:tcPr marL="50189" marR="50189" marT="25095" marB="25095" anchor="ctr">
+                    <a:lnL w="12700" cap="flat" cmpd="sng" algn="ctr">
+                      <a:solidFill>
+                        <a:schemeClr val="bg1"/>
+                      </a:solidFill>
+                      <a:prstDash val="solid"/>
+                      <a:round/>
+                      <a:headEnd type="none" w="med" len="med"/>
+                      <a:tailEnd type="none" w="med" len="med"/>
+                    </a:lnL>
+                    <a:lnR w="12700" cap="flat" cmpd="sng" algn="ctr">
+                      <a:solidFill>
+                        <a:schemeClr val="bg1"/>
+                      </a:solidFill>
+                      <a:prstDash val="solid"/>
+                      <a:round/>
+                      <a:headEnd type="none" w="med" len="med"/>
+                      <a:tailEnd type="none" w="med" len="med"/>
+                    </a:lnR>
+                    <a:lnT w="12700" cap="flat" cmpd="sng" algn="ctr">
+                      <a:solidFill>
+                        <a:schemeClr val="bg1"/>
+                      </a:solidFill>
+                      <a:prstDash val="solid"/>
+                      <a:round/>
+                      <a:headEnd type="none" w="med" len="med"/>
+                      <a:tailEnd type="none" w="med" len="med"/>
+                    </a:lnT>
+                    <a:lnB w="12700" cap="flat" cmpd="sng" algn="ctr">
+                      <a:solidFill>
+                        <a:schemeClr val="bg1"/>
+                      </a:solidFill>
+                      <a:prstDash val="solid"/>
+                      <a:round/>
+                      <a:headEnd type="none" w="med" len="med"/>
+                      <a:tailEnd type="none" w="med" len="med"/>
+                    </a:lnB>
+                  </a:tcPr>
+                </a:tc>
+                <a:tc>
+                  <a:txBody>
+                    <a:bodyPr/>
+                    <a:lstStyle/>
+                    <a:p>
+                      <a:r>
+                        <a:rPr lang="en-US" sz="1200" b="1"/>
+                        <a:t>Another widget</a:t>
+                      </a:r>
+                    </a:p>
+                  </a:txBody>
+                  <a:tcPr marL="50189" marR="50189" marT="25095" marB="25095" anchor="ctr">
+                    <a:lnL w="12700" cap="flat" cmpd="sng" algn="ctr">
+                      <a:solidFill>
+                        <a:schemeClr val="bg1"/>
+                      </a:solidFill>
+                      <a:prstDash val="solid"/>
+                      <a:round/>
+                      <a:headEnd type="none" w="med" len="med"/>
+                      <a:tailEnd type="none" w="med" len="med"/>
+                    </a:lnL>
+                    <a:lnR w="12700" cap="flat" cmpd="sng" algn="ctr">
+                      <a:solidFill>
+                        <a:schemeClr val="bg1"/>
+                      </a:solidFill>
+                      <a:prstDash val="solid"/>
+                      <a:round/>
+                      <a:headEnd type="none" w="med" len="med"/>
+                      <a:tailEnd type="none" w="med" len="med"/>
+                    </a:lnR>
+                    <a:lnT w="12700" cap="flat" cmpd="sng" algn="ctr">
+                      <a:solidFill>
+                        <a:schemeClr val="bg1"/>
+                      </a:solidFill>
+                      <a:prstDash val="solid"/>
+                      <a:round/>
+                      <a:headEnd type="none" w="med" len="med"/>
+                      <a:tailEnd type="none" w="med" len="med"/>
+                    </a:lnT>
+                    <a:lnB w="12700" cap="flat" cmpd="sng" algn="ctr">
+                      <a:solidFill>
+                        <a:schemeClr val="bg1"/>
+                      </a:solidFill>
+                      <a:prstDash val="solid"/>
+                      <a:round/>
+                      <a:headEnd type="none" w="med" len="med"/>
+                      <a:tailEnd type="none" w="med" len="med"/>
+                    </a:lnB>
+                  </a:tcPr>
+                </a:tc>
+                <a:tc>
+                  <a:txBody>
+                    <a:bodyPr/>
+                    <a:lstStyle/>
+                    <a:p>
+                      <a:r>
+                        <a:rPr lang="en-US" sz="1200" b="1"/>
+                        <a:t>Places the widget after another packed widget.</a:t>
+                      </a:r>
+                    </a:p>
+                  </a:txBody>
+                  <a:tcPr marL="50189" marR="50189" marT="25095" marB="25095" anchor="ctr">
+                    <a:lnL w="12700" cap="flat" cmpd="sng" algn="ctr">
+                      <a:solidFill>
+                        <a:schemeClr val="bg1"/>
+                      </a:solidFill>
+                      <a:prstDash val="solid"/>
+                      <a:round/>
+                      <a:headEnd type="none" w="med" len="med"/>
+                      <a:tailEnd type="none" w="med" len="med"/>
+                    </a:lnL>
+                    <a:lnR w="12700" cap="flat" cmpd="sng" algn="ctr">
+                      <a:solidFill>
+                        <a:schemeClr val="bg1"/>
+                      </a:solidFill>
+                      <a:prstDash val="solid"/>
+                      <a:round/>
+                      <a:headEnd type="none" w="med" len="med"/>
+                      <a:tailEnd type="none" w="med" len="med"/>
+                    </a:lnR>
+                    <a:lnT w="12700" cap="flat" cmpd="sng" algn="ctr">
+                      <a:solidFill>
+                        <a:schemeClr val="bg1"/>
+                      </a:solidFill>
+                      <a:prstDash val="solid"/>
+                      <a:round/>
+                      <a:headEnd type="none" w="med" len="med"/>
+                      <a:tailEnd type="none" w="med" len="med"/>
+                    </a:lnT>
+                    <a:lnB w="12700" cap="flat" cmpd="sng" algn="ctr">
+                      <a:solidFill>
+                        <a:schemeClr val="bg1"/>
+                      </a:solidFill>
+                      <a:prstDash val="solid"/>
+                      <a:round/>
+                      <a:headEnd type="none" w="med" len="med"/>
+                      <a:tailEnd type="none" w="med" len="med"/>
+                    </a:lnB>
+                  </a:tcPr>
+                </a:tc>
+                <a:tc>
+                  <a:txBody>
+                    <a:bodyPr/>
+                    <a:lstStyle/>
+                    <a:p>
+                      <a:r>
+                        <a:rPr lang="en-US" sz="1200" b="1" dirty="0"/>
+                        <a:t>pack(after=label1)</a:t>
+                      </a:r>
+                    </a:p>
+                  </a:txBody>
+                  <a:tcPr marL="50189" marR="50189" marT="25095" marB="25095" anchor="ctr">
+                    <a:lnL w="12700" cap="flat" cmpd="sng" algn="ctr">
+                      <a:solidFill>
+                        <a:schemeClr val="bg1"/>
+                      </a:solidFill>
+                      <a:prstDash val="solid"/>
+                      <a:round/>
+                      <a:headEnd type="none" w="med" len="med"/>
+                      <a:tailEnd type="none" w="med" len="med"/>
+                    </a:lnL>
+                    <a:lnR w="12700" cap="flat" cmpd="sng" algn="ctr">
+                      <a:solidFill>
+                        <a:schemeClr val="bg1"/>
+                      </a:solidFill>
+                      <a:prstDash val="solid"/>
+                      <a:round/>
+                      <a:headEnd type="none" w="med" len="med"/>
+                      <a:tailEnd type="none" w="med" len="med"/>
+                    </a:lnR>
+                    <a:lnT w="12700" cap="flat" cmpd="sng" algn="ctr">
+                      <a:solidFill>
+                        <a:schemeClr val="bg1"/>
+                      </a:solidFill>
+                      <a:prstDash val="solid"/>
+                      <a:round/>
+                      <a:headEnd type="none" w="med" len="med"/>
+                      <a:tailEnd type="none" w="med" len="med"/>
+                    </a:lnT>
+                    <a:lnB w="12700" cap="flat" cmpd="sng" algn="ctr">
+                      <a:solidFill>
+                        <a:schemeClr val="bg1"/>
+                      </a:solidFill>
+                      <a:prstDash val="solid"/>
+                      <a:round/>
+                      <a:headEnd type="none" w="med" len="med"/>
+                      <a:tailEnd type="none" w="med" len="med"/>
+                    </a:lnB>
+                  </a:tcPr>
+                </a:tc>
+                <a:extLst>
+                  <a:ext uri="{0D108BD9-81ED-4DB2-BD59-A6C34878D82A}">
+                    <a16:rowId xmlns:a16="http://schemas.microsoft.com/office/drawing/2014/main" val="1962222663"/>
+                  </a:ext>
+                </a:extLst>
+              </a:tr>
+            </a:tbl>
+          </a:graphicData>
+        </a:graphic>
+      </p:graphicFrame>
+    </p:spTree>
+    <p:extLst>
+      <p:ext uri="{BB962C8B-B14F-4D97-AF65-F5344CB8AC3E}">
+        <p14:creationId xmlns:p14="http://schemas.microsoft.com/office/powerpoint/2010/main" val="1177503622"/>
+      </p:ext>
+    </p:extLst>
+  </p:cSld>
+  <p:clrMapOvr>
+    <a:masterClrMapping/>
+  </p:clrMapOvr>
+</p:sld>
+</file>
+
+<file path=ppt/slides/slide8.xml><?xml version="1.0" encoding="utf-8"?>
+<p:sld xmlns:a="http://schemas.openxmlformats.org/drawingml/2006/main" xmlns:r="http://schemas.openxmlformats.org/officeDocument/2006/relationships" xmlns:p="http://schemas.openxmlformats.org/presentationml/2006/main">
+  <p:cSld>
+    <p:spTree>
+      <p:nvGrpSpPr>
+        <p:cNvPr id="1" name=""/>
+        <p:cNvGrpSpPr/>
+        <p:nvPr/>
+      </p:nvGrpSpPr>
+      <p:grpSpPr>
+        <a:xfrm>
+          <a:off x="0" y="0"/>
+          <a:ext cx="0" cy="0"/>
+          <a:chOff x="0" y="0"/>
+          <a:chExt cx="0" cy="0"/>
+        </a:xfrm>
+      </p:grpSpPr>
+    </p:spTree>
+    <p:extLst>
+      <p:ext uri="{BB962C8B-B14F-4D97-AF65-F5344CB8AC3E}">
+        <p14:creationId xmlns:p14="http://schemas.microsoft.com/office/powerpoint/2010/main" val="3193568506"/>
       </p:ext>
     </p:extLst>
   </p:cSld>
